--- a/public/assets/PlantillaCartel2026.pptx
+++ b/public/assets/PlantillaCartel2026.pptx
@@ -2,12 +2,12 @@
 <file path=ppt/presentation.xml><?xml version="1.0" encoding="utf-8"?>
 <p:presentation xmlns:a="http://schemas.openxmlformats.org/drawingml/2006/main" xmlns:r="http://schemas.openxmlformats.org/officeDocument/2006/relationships" xmlns:p="http://schemas.openxmlformats.org/presentationml/2006/main" saveSubsetFonts="1">
   <p:sldMasterIdLst>
-    <p:sldMasterId id="2147483672" r:id="rId1"/>
+    <p:sldMasterId id="2147483660" r:id="rId1"/>
   </p:sldMasterIdLst>
   <p:sldIdLst>
     <p:sldId id="257" r:id="rId2"/>
   </p:sldIdLst>
-  <p:sldSz cx="28800425" cy="39600188"/>
+  <p:sldSz cx="32399288" cy="43200638"/>
   <p:notesSz cx="6858000" cy="9144000"/>
   <p:defaultTextStyle>
     <a:defPPr>
@@ -106,18 +106,7 @@
   </p:defaultTextStyle>
   <p:extLst>
     <p:ext uri="{EFAFB233-063F-42B5-8137-9DF3F51BA10A}">
-      <p15:sldGuideLst xmlns:p15="http://schemas.microsoft.com/office/powerpoint/2012/main">
-        <p15:guide id="1" orient="horz" pos="12473" userDrawn="1">
-          <p15:clr>
-            <a:srgbClr val="A4A3A4"/>
-          </p15:clr>
-        </p15:guide>
-        <p15:guide id="2" pos="9071" userDrawn="1">
-          <p15:clr>
-            <a:srgbClr val="A4A3A4"/>
-          </p15:clr>
-        </p15:guide>
-      </p15:sldGuideLst>
+      <p15:sldGuideLst xmlns:p15="http://schemas.microsoft.com/office/powerpoint/2012/main"/>
     </p:ext>
   </p:extLst>
 </p:presentation>
@@ -152,15 +141,15 @@
         </p:nvSpPr>
         <p:spPr>
           <a:xfrm>
-            <a:off x="2160032" y="6480867"/>
-            <a:ext cx="24480361" cy="13786732"/>
+            <a:off x="2429947" y="7070108"/>
+            <a:ext cx="27539395" cy="15040222"/>
           </a:xfrm>
         </p:spPr>
         <p:txBody>
           <a:bodyPr anchor="b"/>
           <a:lstStyle>
             <a:lvl1pPr algn="ctr">
-              <a:defRPr sz="18898"/>
+              <a:defRPr sz="21259"/>
             </a:lvl1pPr>
           </a:lstStyle>
           <a:p>
@@ -184,8 +173,8 @@
         </p:nvSpPr>
         <p:spPr>
           <a:xfrm>
-            <a:off x="3600053" y="20799268"/>
-            <a:ext cx="21600319" cy="9560876"/>
+            <a:off x="4049911" y="22690338"/>
+            <a:ext cx="24299466" cy="10430151"/>
           </a:xfrm>
         </p:spPr>
         <p:txBody>
@@ -193,39 +182,39 @@
           <a:lstStyle>
             <a:lvl1pPr marL="0" indent="0" algn="ctr">
               <a:buNone/>
-              <a:defRPr sz="7559"/>
+              <a:defRPr sz="8504"/>
             </a:lvl1pPr>
-            <a:lvl2pPr marL="1440043" indent="0" algn="ctr">
-              <a:buNone/>
-              <a:defRPr sz="6299"/>
+            <a:lvl2pPr marL="1619951" indent="0" algn="ctr">
+              <a:buNone/>
+              <a:defRPr sz="7086"/>
             </a:lvl2pPr>
-            <a:lvl3pPr marL="2880086" indent="0" algn="ctr">
+            <a:lvl3pPr marL="3239902" indent="0" algn="ctr">
+              <a:buNone/>
+              <a:defRPr sz="6378"/>
+            </a:lvl3pPr>
+            <a:lvl4pPr marL="4859853" indent="0" algn="ctr">
               <a:buNone/>
               <a:defRPr sz="5669"/>
-            </a:lvl3pPr>
-            <a:lvl4pPr marL="4320129" indent="0" algn="ctr">
-              <a:buNone/>
-              <a:defRPr sz="5040"/>
             </a:lvl4pPr>
-            <a:lvl5pPr marL="5760171" indent="0" algn="ctr">
-              <a:buNone/>
-              <a:defRPr sz="5040"/>
+            <a:lvl5pPr marL="6479804" indent="0" algn="ctr">
+              <a:buNone/>
+              <a:defRPr sz="5669"/>
             </a:lvl5pPr>
-            <a:lvl6pPr marL="7200214" indent="0" algn="ctr">
-              <a:buNone/>
-              <a:defRPr sz="5040"/>
+            <a:lvl6pPr marL="8099755" indent="0" algn="ctr">
+              <a:buNone/>
+              <a:defRPr sz="5669"/>
             </a:lvl6pPr>
-            <a:lvl7pPr marL="8640257" indent="0" algn="ctr">
-              <a:buNone/>
-              <a:defRPr sz="5040"/>
+            <a:lvl7pPr marL="9719706" indent="0" algn="ctr">
+              <a:buNone/>
+              <a:defRPr sz="5669"/>
             </a:lvl7pPr>
-            <a:lvl8pPr marL="10080300" indent="0" algn="ctr">
-              <a:buNone/>
-              <a:defRPr sz="5040"/>
+            <a:lvl8pPr marL="11339657" indent="0" algn="ctr">
+              <a:buNone/>
+              <a:defRPr sz="5669"/>
             </a:lvl8pPr>
-            <a:lvl9pPr marL="11520343" indent="0" algn="ctr">
-              <a:buNone/>
-              <a:defRPr sz="5040"/>
+            <a:lvl9pPr marL="12959608" indent="0" algn="ctr">
+              <a:buNone/>
+              <a:defRPr sz="5669"/>
             </a:lvl9pPr>
           </a:lstStyle>
           <a:p>
@@ -252,9 +241,9 @@
           <a:bodyPr/>
           <a:lstStyle/>
           <a:p>
-            <a:fld id="{C063C3BB-6D71-4B0B-AC40-9EA013683E11}" type="datetimeFigureOut">
+            <a:fld id="{3498CC9A-6EF8-4CC1-99DE-9957FB4ED3A6}" type="datetimeFigureOut">
               <a:rPr lang="es-MX" smtClean="0"/>
-              <a:t>26/02/26</a:t>
+              <a:t>04/03/26</a:t>
             </a:fld>
             <a:endParaRPr lang="es-MX"/>
           </a:p>
@@ -294,7 +283,7 @@
           <a:bodyPr/>
           <a:lstStyle/>
           <a:p>
-            <a:fld id="{AFD07E46-D442-4EDD-B2A5-4E989111785B}" type="slidenum">
+            <a:fld id="{4A480BF9-F426-49F0-850A-28B43F6EB11F}" type="slidenum">
               <a:rPr lang="es-MX" smtClean="0"/>
               <a:t>‹Nº›</a:t>
             </a:fld>
@@ -305,7 +294,7 @@
     </p:spTree>
     <p:extLst>
       <p:ext uri="{BB962C8B-B14F-4D97-AF65-F5344CB8AC3E}">
-        <p14:creationId xmlns:p14="http://schemas.microsoft.com/office/powerpoint/2010/main" val="226877721"/>
+        <p14:creationId xmlns:p14="http://schemas.microsoft.com/office/powerpoint/2010/main" val="3696570838"/>
       </p:ext>
     </p:extLst>
   </p:cSld>
@@ -422,9 +411,9 @@
           <a:bodyPr/>
           <a:lstStyle/>
           <a:p>
-            <a:fld id="{C063C3BB-6D71-4B0B-AC40-9EA013683E11}" type="datetimeFigureOut">
+            <a:fld id="{3498CC9A-6EF8-4CC1-99DE-9957FB4ED3A6}" type="datetimeFigureOut">
               <a:rPr lang="es-MX" smtClean="0"/>
-              <a:t>26/02/26</a:t>
+              <a:t>04/03/26</a:t>
             </a:fld>
             <a:endParaRPr lang="es-MX"/>
           </a:p>
@@ -464,7 +453,7 @@
           <a:bodyPr/>
           <a:lstStyle/>
           <a:p>
-            <a:fld id="{AFD07E46-D442-4EDD-B2A5-4E989111785B}" type="slidenum">
+            <a:fld id="{4A480BF9-F426-49F0-850A-28B43F6EB11F}" type="slidenum">
               <a:rPr lang="es-MX" smtClean="0"/>
               <a:t>‹Nº›</a:t>
             </a:fld>
@@ -475,7 +464,7 @@
     </p:spTree>
     <p:extLst>
       <p:ext uri="{BB962C8B-B14F-4D97-AF65-F5344CB8AC3E}">
-        <p14:creationId xmlns:p14="http://schemas.microsoft.com/office/powerpoint/2010/main" val="141014030"/>
+        <p14:creationId xmlns:p14="http://schemas.microsoft.com/office/powerpoint/2010/main" val="570348417"/>
       </p:ext>
     </p:extLst>
   </p:cSld>
@@ -514,8 +503,8 @@
         </p:nvSpPr>
         <p:spPr>
           <a:xfrm>
-            <a:off x="20610306" y="2108343"/>
-            <a:ext cx="6210092" cy="33559329"/>
+            <a:off x="23185742" y="2300034"/>
+            <a:ext cx="6986096" cy="36610544"/>
           </a:xfrm>
         </p:spPr>
         <p:txBody>
@@ -542,8 +531,8 @@
         </p:nvSpPr>
         <p:spPr>
           <a:xfrm>
-            <a:off x="1980031" y="2108343"/>
-            <a:ext cx="18270270" cy="33559329"/>
+            <a:off x="2227453" y="2300034"/>
+            <a:ext cx="20553298" cy="36610544"/>
           </a:xfrm>
         </p:spPr>
         <p:txBody>
@@ -602,9 +591,9 @@
           <a:bodyPr/>
           <a:lstStyle/>
           <a:p>
-            <a:fld id="{C063C3BB-6D71-4B0B-AC40-9EA013683E11}" type="datetimeFigureOut">
+            <a:fld id="{3498CC9A-6EF8-4CC1-99DE-9957FB4ED3A6}" type="datetimeFigureOut">
               <a:rPr lang="es-MX" smtClean="0"/>
-              <a:t>26/02/26</a:t>
+              <a:t>04/03/26</a:t>
             </a:fld>
             <a:endParaRPr lang="es-MX"/>
           </a:p>
@@ -644,7 +633,7 @@
           <a:bodyPr/>
           <a:lstStyle/>
           <a:p>
-            <a:fld id="{AFD07E46-D442-4EDD-B2A5-4E989111785B}" type="slidenum">
+            <a:fld id="{4A480BF9-F426-49F0-850A-28B43F6EB11F}" type="slidenum">
               <a:rPr lang="es-MX" smtClean="0"/>
               <a:t>‹Nº›</a:t>
             </a:fld>
@@ -655,7 +644,7 @@
     </p:spTree>
     <p:extLst>
       <p:ext uri="{BB962C8B-B14F-4D97-AF65-F5344CB8AC3E}">
-        <p14:creationId xmlns:p14="http://schemas.microsoft.com/office/powerpoint/2010/main" val="246098445"/>
+        <p14:creationId xmlns:p14="http://schemas.microsoft.com/office/powerpoint/2010/main" val="244294295"/>
       </p:ext>
     </p:extLst>
   </p:cSld>
@@ -772,9 +761,9 @@
           <a:bodyPr/>
           <a:lstStyle/>
           <a:p>
-            <a:fld id="{C063C3BB-6D71-4B0B-AC40-9EA013683E11}" type="datetimeFigureOut">
+            <a:fld id="{3498CC9A-6EF8-4CC1-99DE-9957FB4ED3A6}" type="datetimeFigureOut">
               <a:rPr lang="es-MX" smtClean="0"/>
-              <a:t>26/02/26</a:t>
+              <a:t>04/03/26</a:t>
             </a:fld>
             <a:endParaRPr lang="es-MX"/>
           </a:p>
@@ -814,7 +803,7 @@
           <a:bodyPr/>
           <a:lstStyle/>
           <a:p>
-            <a:fld id="{AFD07E46-D442-4EDD-B2A5-4E989111785B}" type="slidenum">
+            <a:fld id="{4A480BF9-F426-49F0-850A-28B43F6EB11F}" type="slidenum">
               <a:rPr lang="es-MX" smtClean="0"/>
               <a:t>‹Nº›</a:t>
             </a:fld>
@@ -825,7 +814,7 @@
     </p:spTree>
     <p:extLst>
       <p:ext uri="{BB962C8B-B14F-4D97-AF65-F5344CB8AC3E}">
-        <p14:creationId xmlns:p14="http://schemas.microsoft.com/office/powerpoint/2010/main" val="1086974733"/>
+        <p14:creationId xmlns:p14="http://schemas.microsoft.com/office/powerpoint/2010/main" val="3205331112"/>
       </p:ext>
     </p:extLst>
   </p:cSld>
@@ -864,15 +853,15 @@
         </p:nvSpPr>
         <p:spPr>
           <a:xfrm>
-            <a:off x="1965030" y="9872559"/>
-            <a:ext cx="24840367" cy="16472575"/>
+            <a:off x="2210578" y="10770172"/>
+            <a:ext cx="27944386" cy="17970262"/>
           </a:xfrm>
         </p:spPr>
         <p:txBody>
           <a:bodyPr anchor="b"/>
           <a:lstStyle>
             <a:lvl1pPr>
-              <a:defRPr sz="18898"/>
+              <a:defRPr sz="21259"/>
             </a:lvl1pPr>
           </a:lstStyle>
           <a:p>
@@ -896,8 +885,8 @@
         </p:nvSpPr>
         <p:spPr>
           <a:xfrm>
-            <a:off x="1965030" y="26500971"/>
-            <a:ext cx="24840367" cy="8662538"/>
+            <a:off x="2210578" y="28910440"/>
+            <a:ext cx="27944386" cy="9450136"/>
           </a:xfrm>
         </p:spPr>
         <p:txBody>
@@ -905,88 +894,90 @@
           <a:lstStyle>
             <a:lvl1pPr marL="0" indent="0">
               <a:buNone/>
-              <a:defRPr sz="7559">
+              <a:defRPr sz="8504">
                 <a:solidFill>
-                  <a:schemeClr val="tx1"/>
+                  <a:schemeClr val="tx1">
+                    <a:tint val="82000"/>
+                  </a:schemeClr>
                 </a:solidFill>
               </a:defRPr>
             </a:lvl1pPr>
-            <a:lvl2pPr marL="1440043" indent="0">
-              <a:buNone/>
-              <a:defRPr sz="6299">
+            <a:lvl2pPr marL="1619951" indent="0">
+              <a:buNone/>
+              <a:defRPr sz="7086">
                 <a:solidFill>
                   <a:schemeClr val="tx1">
-                    <a:tint val="75000"/>
+                    <a:tint val="82000"/>
                   </a:schemeClr>
                 </a:solidFill>
               </a:defRPr>
             </a:lvl2pPr>
-            <a:lvl3pPr marL="2880086" indent="0">
-              <a:buNone/>
-              <a:defRPr sz="5669">
+            <a:lvl3pPr marL="3239902" indent="0">
+              <a:buNone/>
+              <a:defRPr sz="6378">
                 <a:solidFill>
                   <a:schemeClr val="tx1">
-                    <a:tint val="75000"/>
+                    <a:tint val="82000"/>
                   </a:schemeClr>
                 </a:solidFill>
               </a:defRPr>
             </a:lvl3pPr>
-            <a:lvl4pPr marL="4320129" indent="0">
-              <a:buNone/>
-              <a:defRPr sz="5040">
+            <a:lvl4pPr marL="4859853" indent="0">
+              <a:buNone/>
+              <a:defRPr sz="5669">
                 <a:solidFill>
                   <a:schemeClr val="tx1">
-                    <a:tint val="75000"/>
+                    <a:tint val="82000"/>
                   </a:schemeClr>
                 </a:solidFill>
               </a:defRPr>
             </a:lvl4pPr>
-            <a:lvl5pPr marL="5760171" indent="0">
-              <a:buNone/>
-              <a:defRPr sz="5040">
+            <a:lvl5pPr marL="6479804" indent="0">
+              <a:buNone/>
+              <a:defRPr sz="5669">
                 <a:solidFill>
                   <a:schemeClr val="tx1">
-                    <a:tint val="75000"/>
+                    <a:tint val="82000"/>
                   </a:schemeClr>
                 </a:solidFill>
               </a:defRPr>
             </a:lvl5pPr>
-            <a:lvl6pPr marL="7200214" indent="0">
-              <a:buNone/>
-              <a:defRPr sz="5040">
+            <a:lvl6pPr marL="8099755" indent="0">
+              <a:buNone/>
+              <a:defRPr sz="5669">
                 <a:solidFill>
                   <a:schemeClr val="tx1">
-                    <a:tint val="75000"/>
+                    <a:tint val="82000"/>
                   </a:schemeClr>
                 </a:solidFill>
               </a:defRPr>
             </a:lvl6pPr>
-            <a:lvl7pPr marL="8640257" indent="0">
-              <a:buNone/>
-              <a:defRPr sz="5040">
+            <a:lvl7pPr marL="9719706" indent="0">
+              <a:buNone/>
+              <a:defRPr sz="5669">
                 <a:solidFill>
                   <a:schemeClr val="tx1">
-                    <a:tint val="75000"/>
+                    <a:tint val="82000"/>
                   </a:schemeClr>
                 </a:solidFill>
               </a:defRPr>
             </a:lvl7pPr>
-            <a:lvl8pPr marL="10080300" indent="0">
-              <a:buNone/>
-              <a:defRPr sz="5040">
+            <a:lvl8pPr marL="11339657" indent="0">
+              <a:buNone/>
+              <a:defRPr sz="5669">
                 <a:solidFill>
                   <a:schemeClr val="tx1">
-                    <a:tint val="75000"/>
+                    <a:tint val="82000"/>
                   </a:schemeClr>
                 </a:solidFill>
               </a:defRPr>
             </a:lvl8pPr>
-            <a:lvl9pPr marL="11520343" indent="0">
-              <a:buNone/>
-              <a:defRPr sz="5040">
+            <a:lvl9pPr marL="12959608" indent="0">
+              <a:buNone/>
+              <a:defRPr sz="5669">
                 <a:solidFill>
                   <a:schemeClr val="tx1">
-                    <a:tint val="75000"/>
+                    <a:tint val="82000"/>
                   </a:schemeClr>
                 </a:solidFill>
               </a:defRPr>
@@ -1016,9 +1007,9 @@
           <a:bodyPr/>
           <a:lstStyle/>
           <a:p>
-            <a:fld id="{C063C3BB-6D71-4B0B-AC40-9EA013683E11}" type="datetimeFigureOut">
+            <a:fld id="{3498CC9A-6EF8-4CC1-99DE-9957FB4ED3A6}" type="datetimeFigureOut">
               <a:rPr lang="es-MX" smtClean="0"/>
-              <a:t>26/02/26</a:t>
+              <a:t>04/03/26</a:t>
             </a:fld>
             <a:endParaRPr lang="es-MX"/>
           </a:p>
@@ -1058,7 +1049,7 @@
           <a:bodyPr/>
           <a:lstStyle/>
           <a:p>
-            <a:fld id="{AFD07E46-D442-4EDD-B2A5-4E989111785B}" type="slidenum">
+            <a:fld id="{4A480BF9-F426-49F0-850A-28B43F6EB11F}" type="slidenum">
               <a:rPr lang="es-MX" smtClean="0"/>
               <a:t>‹Nº›</a:t>
             </a:fld>
@@ -1069,7 +1060,7 @@
     </p:spTree>
     <p:extLst>
       <p:ext uri="{BB962C8B-B14F-4D97-AF65-F5344CB8AC3E}">
-        <p14:creationId xmlns:p14="http://schemas.microsoft.com/office/powerpoint/2010/main" val="3763927548"/>
+        <p14:creationId xmlns:p14="http://schemas.microsoft.com/office/powerpoint/2010/main" val="1058415560"/>
       </p:ext>
     </p:extLst>
   </p:cSld>
@@ -1131,8 +1122,8 @@
         </p:nvSpPr>
         <p:spPr>
           <a:xfrm>
-            <a:off x="1980029" y="10541716"/>
-            <a:ext cx="12240181" cy="25125956"/>
+            <a:off x="2227451" y="11500170"/>
+            <a:ext cx="13769697" cy="27410408"/>
           </a:xfrm>
         </p:spPr>
         <p:txBody>
@@ -1188,8 +1179,8 @@
         </p:nvSpPr>
         <p:spPr>
           <a:xfrm>
-            <a:off x="14580215" y="10541716"/>
-            <a:ext cx="12240181" cy="25125956"/>
+            <a:off x="16402140" y="11500170"/>
+            <a:ext cx="13769697" cy="27410408"/>
           </a:xfrm>
         </p:spPr>
         <p:txBody>
@@ -1248,9 +1239,9 @@
           <a:bodyPr/>
           <a:lstStyle/>
           <a:p>
-            <a:fld id="{C063C3BB-6D71-4B0B-AC40-9EA013683E11}" type="datetimeFigureOut">
+            <a:fld id="{3498CC9A-6EF8-4CC1-99DE-9957FB4ED3A6}" type="datetimeFigureOut">
               <a:rPr lang="es-MX" smtClean="0"/>
-              <a:t>26/02/26</a:t>
+              <a:t>04/03/26</a:t>
             </a:fld>
             <a:endParaRPr lang="es-MX"/>
           </a:p>
@@ -1290,7 +1281,7 @@
           <a:bodyPr/>
           <a:lstStyle/>
           <a:p>
-            <a:fld id="{AFD07E46-D442-4EDD-B2A5-4E989111785B}" type="slidenum">
+            <a:fld id="{4A480BF9-F426-49F0-850A-28B43F6EB11F}" type="slidenum">
               <a:rPr lang="es-MX" smtClean="0"/>
               <a:t>‹Nº›</a:t>
             </a:fld>
@@ -1301,7 +1292,7 @@
     </p:spTree>
     <p:extLst>
       <p:ext uri="{BB962C8B-B14F-4D97-AF65-F5344CB8AC3E}">
-        <p14:creationId xmlns:p14="http://schemas.microsoft.com/office/powerpoint/2010/main" val="924115675"/>
+        <p14:creationId xmlns:p14="http://schemas.microsoft.com/office/powerpoint/2010/main" val="539382638"/>
       </p:ext>
     </p:extLst>
   </p:cSld>
@@ -1340,8 +1331,8 @@
         </p:nvSpPr>
         <p:spPr>
           <a:xfrm>
-            <a:off x="1983780" y="2108352"/>
-            <a:ext cx="24840367" cy="7654206"/>
+            <a:off x="2231671" y="2300044"/>
+            <a:ext cx="27944386" cy="8350126"/>
           </a:xfrm>
         </p:spPr>
         <p:txBody>
@@ -1368,8 +1359,8 @@
         </p:nvSpPr>
         <p:spPr>
           <a:xfrm>
-            <a:off x="1983784" y="9707549"/>
-            <a:ext cx="12183928" cy="4757520"/>
+            <a:off x="2231675" y="10590160"/>
+            <a:ext cx="13706415" cy="5190073"/>
           </a:xfrm>
         </p:spPr>
         <p:txBody>
@@ -1377,39 +1368,39 @@
           <a:lstStyle>
             <a:lvl1pPr marL="0" indent="0">
               <a:buNone/>
-              <a:defRPr sz="7559" b="1"/>
+              <a:defRPr sz="8504" b="1"/>
             </a:lvl1pPr>
-            <a:lvl2pPr marL="1440043" indent="0">
-              <a:buNone/>
-              <a:defRPr sz="6299" b="1"/>
+            <a:lvl2pPr marL="1619951" indent="0">
+              <a:buNone/>
+              <a:defRPr sz="7086" b="1"/>
             </a:lvl2pPr>
-            <a:lvl3pPr marL="2880086" indent="0">
+            <a:lvl3pPr marL="3239902" indent="0">
+              <a:buNone/>
+              <a:defRPr sz="6378" b="1"/>
+            </a:lvl3pPr>
+            <a:lvl4pPr marL="4859853" indent="0">
               <a:buNone/>
               <a:defRPr sz="5669" b="1"/>
-            </a:lvl3pPr>
-            <a:lvl4pPr marL="4320129" indent="0">
-              <a:buNone/>
-              <a:defRPr sz="5040" b="1"/>
             </a:lvl4pPr>
-            <a:lvl5pPr marL="5760171" indent="0">
-              <a:buNone/>
-              <a:defRPr sz="5040" b="1"/>
+            <a:lvl5pPr marL="6479804" indent="0">
+              <a:buNone/>
+              <a:defRPr sz="5669" b="1"/>
             </a:lvl5pPr>
-            <a:lvl6pPr marL="7200214" indent="0">
-              <a:buNone/>
-              <a:defRPr sz="5040" b="1"/>
+            <a:lvl6pPr marL="8099755" indent="0">
+              <a:buNone/>
+              <a:defRPr sz="5669" b="1"/>
             </a:lvl6pPr>
-            <a:lvl7pPr marL="8640257" indent="0">
-              <a:buNone/>
-              <a:defRPr sz="5040" b="1"/>
+            <a:lvl7pPr marL="9719706" indent="0">
+              <a:buNone/>
+              <a:defRPr sz="5669" b="1"/>
             </a:lvl7pPr>
-            <a:lvl8pPr marL="10080300" indent="0">
-              <a:buNone/>
-              <a:defRPr sz="5040" b="1"/>
+            <a:lvl8pPr marL="11339657" indent="0">
+              <a:buNone/>
+              <a:defRPr sz="5669" b="1"/>
             </a:lvl8pPr>
-            <a:lvl9pPr marL="11520343" indent="0">
-              <a:buNone/>
-              <a:defRPr sz="5040" b="1"/>
+            <a:lvl9pPr marL="12959608" indent="0">
+              <a:buNone/>
+              <a:defRPr sz="5669" b="1"/>
             </a:lvl9pPr>
           </a:lstStyle>
           <a:p>
@@ -1433,8 +1424,8 @@
         </p:nvSpPr>
         <p:spPr>
           <a:xfrm>
-            <a:off x="1983784" y="14465069"/>
-            <a:ext cx="12183928" cy="21275937"/>
+            <a:off x="2231675" y="15780233"/>
+            <a:ext cx="13706415" cy="23210346"/>
           </a:xfrm>
         </p:spPr>
         <p:txBody>
@@ -1490,8 +1481,8 @@
         </p:nvSpPr>
         <p:spPr>
           <a:xfrm>
-            <a:off x="14580217" y="9707549"/>
-            <a:ext cx="12243932" cy="4757520"/>
+            <a:off x="16402142" y="10590160"/>
+            <a:ext cx="13773917" cy="5190073"/>
           </a:xfrm>
         </p:spPr>
         <p:txBody>
@@ -1499,39 +1490,39 @@
           <a:lstStyle>
             <a:lvl1pPr marL="0" indent="0">
               <a:buNone/>
-              <a:defRPr sz="7559" b="1"/>
+              <a:defRPr sz="8504" b="1"/>
             </a:lvl1pPr>
-            <a:lvl2pPr marL="1440043" indent="0">
-              <a:buNone/>
-              <a:defRPr sz="6299" b="1"/>
+            <a:lvl2pPr marL="1619951" indent="0">
+              <a:buNone/>
+              <a:defRPr sz="7086" b="1"/>
             </a:lvl2pPr>
-            <a:lvl3pPr marL="2880086" indent="0">
+            <a:lvl3pPr marL="3239902" indent="0">
+              <a:buNone/>
+              <a:defRPr sz="6378" b="1"/>
+            </a:lvl3pPr>
+            <a:lvl4pPr marL="4859853" indent="0">
               <a:buNone/>
               <a:defRPr sz="5669" b="1"/>
-            </a:lvl3pPr>
-            <a:lvl4pPr marL="4320129" indent="0">
-              <a:buNone/>
-              <a:defRPr sz="5040" b="1"/>
             </a:lvl4pPr>
-            <a:lvl5pPr marL="5760171" indent="0">
-              <a:buNone/>
-              <a:defRPr sz="5040" b="1"/>
+            <a:lvl5pPr marL="6479804" indent="0">
+              <a:buNone/>
+              <a:defRPr sz="5669" b="1"/>
             </a:lvl5pPr>
-            <a:lvl6pPr marL="7200214" indent="0">
-              <a:buNone/>
-              <a:defRPr sz="5040" b="1"/>
+            <a:lvl6pPr marL="8099755" indent="0">
+              <a:buNone/>
+              <a:defRPr sz="5669" b="1"/>
             </a:lvl6pPr>
-            <a:lvl7pPr marL="8640257" indent="0">
-              <a:buNone/>
-              <a:defRPr sz="5040" b="1"/>
+            <a:lvl7pPr marL="9719706" indent="0">
+              <a:buNone/>
+              <a:defRPr sz="5669" b="1"/>
             </a:lvl7pPr>
-            <a:lvl8pPr marL="10080300" indent="0">
-              <a:buNone/>
-              <a:defRPr sz="5040" b="1"/>
+            <a:lvl8pPr marL="11339657" indent="0">
+              <a:buNone/>
+              <a:defRPr sz="5669" b="1"/>
             </a:lvl8pPr>
-            <a:lvl9pPr marL="11520343" indent="0">
-              <a:buNone/>
-              <a:defRPr sz="5040" b="1"/>
+            <a:lvl9pPr marL="12959608" indent="0">
+              <a:buNone/>
+              <a:defRPr sz="5669" b="1"/>
             </a:lvl9pPr>
           </a:lstStyle>
           <a:p>
@@ -1555,8 +1546,8 @@
         </p:nvSpPr>
         <p:spPr>
           <a:xfrm>
-            <a:off x="14580217" y="14465069"/>
-            <a:ext cx="12243932" cy="21275937"/>
+            <a:off x="16402142" y="15780233"/>
+            <a:ext cx="13773917" cy="23210346"/>
           </a:xfrm>
         </p:spPr>
         <p:txBody>
@@ -1615,9 +1606,9 @@
           <a:bodyPr/>
           <a:lstStyle/>
           <a:p>
-            <a:fld id="{C063C3BB-6D71-4B0B-AC40-9EA013683E11}" type="datetimeFigureOut">
+            <a:fld id="{3498CC9A-6EF8-4CC1-99DE-9957FB4ED3A6}" type="datetimeFigureOut">
               <a:rPr lang="es-MX" smtClean="0"/>
-              <a:t>26/02/26</a:t>
+              <a:t>04/03/26</a:t>
             </a:fld>
             <a:endParaRPr lang="es-MX"/>
           </a:p>
@@ -1657,7 +1648,7 @@
           <a:bodyPr/>
           <a:lstStyle/>
           <a:p>
-            <a:fld id="{AFD07E46-D442-4EDD-B2A5-4E989111785B}" type="slidenum">
+            <a:fld id="{4A480BF9-F426-49F0-850A-28B43F6EB11F}" type="slidenum">
               <a:rPr lang="es-MX" smtClean="0"/>
               <a:t>‹Nº›</a:t>
             </a:fld>
@@ -1668,7 +1659,7 @@
     </p:spTree>
     <p:extLst>
       <p:ext uri="{BB962C8B-B14F-4D97-AF65-F5344CB8AC3E}">
-        <p14:creationId xmlns:p14="http://schemas.microsoft.com/office/powerpoint/2010/main" val="3998790867"/>
+        <p14:creationId xmlns:p14="http://schemas.microsoft.com/office/powerpoint/2010/main" val="997556114"/>
       </p:ext>
     </p:extLst>
   </p:cSld>
@@ -1733,9 +1724,9 @@
           <a:bodyPr/>
           <a:lstStyle/>
           <a:p>
-            <a:fld id="{C063C3BB-6D71-4B0B-AC40-9EA013683E11}" type="datetimeFigureOut">
+            <a:fld id="{3498CC9A-6EF8-4CC1-99DE-9957FB4ED3A6}" type="datetimeFigureOut">
               <a:rPr lang="es-MX" smtClean="0"/>
-              <a:t>26/02/26</a:t>
+              <a:t>04/03/26</a:t>
             </a:fld>
             <a:endParaRPr lang="es-MX"/>
           </a:p>
@@ -1775,7 +1766,7 @@
           <a:bodyPr/>
           <a:lstStyle/>
           <a:p>
-            <a:fld id="{AFD07E46-D442-4EDD-B2A5-4E989111785B}" type="slidenum">
+            <a:fld id="{4A480BF9-F426-49F0-850A-28B43F6EB11F}" type="slidenum">
               <a:rPr lang="es-MX" smtClean="0"/>
               <a:t>‹Nº›</a:t>
             </a:fld>
@@ -1786,7 +1777,7 @@
     </p:spTree>
     <p:extLst>
       <p:ext uri="{BB962C8B-B14F-4D97-AF65-F5344CB8AC3E}">
-        <p14:creationId xmlns:p14="http://schemas.microsoft.com/office/powerpoint/2010/main" val="3849658566"/>
+        <p14:creationId xmlns:p14="http://schemas.microsoft.com/office/powerpoint/2010/main" val="2331725007"/>
       </p:ext>
     </p:extLst>
   </p:cSld>
@@ -1828,9 +1819,9 @@
           <a:bodyPr/>
           <a:lstStyle/>
           <a:p>
-            <a:fld id="{C063C3BB-6D71-4B0B-AC40-9EA013683E11}" type="datetimeFigureOut">
+            <a:fld id="{3498CC9A-6EF8-4CC1-99DE-9957FB4ED3A6}" type="datetimeFigureOut">
               <a:rPr lang="es-MX" smtClean="0"/>
-              <a:t>26/02/26</a:t>
+              <a:t>04/03/26</a:t>
             </a:fld>
             <a:endParaRPr lang="es-MX"/>
           </a:p>
@@ -1870,7 +1861,7 @@
           <a:bodyPr/>
           <a:lstStyle/>
           <a:p>
-            <a:fld id="{AFD07E46-D442-4EDD-B2A5-4E989111785B}" type="slidenum">
+            <a:fld id="{4A480BF9-F426-49F0-850A-28B43F6EB11F}" type="slidenum">
               <a:rPr lang="es-MX" smtClean="0"/>
               <a:t>‹Nº›</a:t>
             </a:fld>
@@ -1881,7 +1872,7 @@
     </p:spTree>
     <p:extLst>
       <p:ext uri="{BB962C8B-B14F-4D97-AF65-F5344CB8AC3E}">
-        <p14:creationId xmlns:p14="http://schemas.microsoft.com/office/powerpoint/2010/main" val="154175383"/>
+        <p14:creationId xmlns:p14="http://schemas.microsoft.com/office/powerpoint/2010/main" val="671578751"/>
       </p:ext>
     </p:extLst>
   </p:cSld>
@@ -1920,15 +1911,15 @@
         </p:nvSpPr>
         <p:spPr>
           <a:xfrm>
-            <a:off x="1983780" y="2640012"/>
-            <a:ext cx="9288887" cy="9240044"/>
+            <a:off x="2231671" y="2880042"/>
+            <a:ext cx="10449614" cy="10080149"/>
           </a:xfrm>
         </p:spPr>
         <p:txBody>
           <a:bodyPr anchor="b"/>
           <a:lstStyle>
             <a:lvl1pPr>
-              <a:defRPr sz="10079"/>
+              <a:defRPr sz="11338"/>
             </a:lvl1pPr>
           </a:lstStyle>
           <a:p>
@@ -1952,39 +1943,39 @@
         </p:nvSpPr>
         <p:spPr>
           <a:xfrm>
-            <a:off x="12243932" y="5701703"/>
-            <a:ext cx="14580215" cy="28141800"/>
+            <a:off x="13773917" y="6220102"/>
+            <a:ext cx="16402140" cy="30700453"/>
           </a:xfrm>
         </p:spPr>
         <p:txBody>
           <a:bodyPr/>
           <a:lstStyle>
             <a:lvl1pPr>
-              <a:defRPr sz="10079"/>
+              <a:defRPr sz="11338"/>
             </a:lvl1pPr>
             <a:lvl2pPr>
-              <a:defRPr sz="8819"/>
+              <a:defRPr sz="9921"/>
             </a:lvl2pPr>
             <a:lvl3pPr>
-              <a:defRPr sz="7559"/>
+              <a:defRPr sz="8504"/>
             </a:lvl3pPr>
             <a:lvl4pPr>
-              <a:defRPr sz="6299"/>
+              <a:defRPr sz="7086"/>
             </a:lvl4pPr>
             <a:lvl5pPr>
-              <a:defRPr sz="6299"/>
+              <a:defRPr sz="7086"/>
             </a:lvl5pPr>
             <a:lvl6pPr>
-              <a:defRPr sz="6299"/>
+              <a:defRPr sz="7086"/>
             </a:lvl6pPr>
             <a:lvl7pPr>
-              <a:defRPr sz="6299"/>
+              <a:defRPr sz="7086"/>
             </a:lvl7pPr>
             <a:lvl8pPr>
-              <a:defRPr sz="6299"/>
+              <a:defRPr sz="7086"/>
             </a:lvl8pPr>
             <a:lvl9pPr>
-              <a:defRPr sz="6299"/>
+              <a:defRPr sz="7086"/>
             </a:lvl9pPr>
           </a:lstStyle>
           <a:p>
@@ -2037,8 +2028,8 @@
         </p:nvSpPr>
         <p:spPr>
           <a:xfrm>
-            <a:off x="1983780" y="11880056"/>
-            <a:ext cx="9288887" cy="22009274"/>
+            <a:off x="2231671" y="12960191"/>
+            <a:ext cx="10449614" cy="24010358"/>
           </a:xfrm>
         </p:spPr>
         <p:txBody>
@@ -2046,39 +2037,39 @@
           <a:lstStyle>
             <a:lvl1pPr marL="0" indent="0">
               <a:buNone/>
-              <a:defRPr sz="5040"/>
+              <a:defRPr sz="5669"/>
             </a:lvl1pPr>
-            <a:lvl2pPr marL="1440043" indent="0">
-              <a:buNone/>
-              <a:defRPr sz="4410"/>
+            <a:lvl2pPr marL="1619951" indent="0">
+              <a:buNone/>
+              <a:defRPr sz="4960"/>
             </a:lvl2pPr>
-            <a:lvl3pPr marL="2880086" indent="0">
-              <a:buNone/>
-              <a:defRPr sz="3780"/>
+            <a:lvl3pPr marL="3239902" indent="0">
+              <a:buNone/>
+              <a:defRPr sz="4252"/>
             </a:lvl3pPr>
-            <a:lvl4pPr marL="4320129" indent="0">
-              <a:buNone/>
-              <a:defRPr sz="3150"/>
+            <a:lvl4pPr marL="4859853" indent="0">
+              <a:buNone/>
+              <a:defRPr sz="3543"/>
             </a:lvl4pPr>
-            <a:lvl5pPr marL="5760171" indent="0">
-              <a:buNone/>
-              <a:defRPr sz="3150"/>
+            <a:lvl5pPr marL="6479804" indent="0">
+              <a:buNone/>
+              <a:defRPr sz="3543"/>
             </a:lvl5pPr>
-            <a:lvl6pPr marL="7200214" indent="0">
-              <a:buNone/>
-              <a:defRPr sz="3150"/>
+            <a:lvl6pPr marL="8099755" indent="0">
+              <a:buNone/>
+              <a:defRPr sz="3543"/>
             </a:lvl6pPr>
-            <a:lvl7pPr marL="8640257" indent="0">
-              <a:buNone/>
-              <a:defRPr sz="3150"/>
+            <a:lvl7pPr marL="9719706" indent="0">
+              <a:buNone/>
+              <a:defRPr sz="3543"/>
             </a:lvl7pPr>
-            <a:lvl8pPr marL="10080300" indent="0">
-              <a:buNone/>
-              <a:defRPr sz="3150"/>
+            <a:lvl8pPr marL="11339657" indent="0">
+              <a:buNone/>
+              <a:defRPr sz="3543"/>
             </a:lvl8pPr>
-            <a:lvl9pPr marL="11520343" indent="0">
-              <a:buNone/>
-              <a:defRPr sz="3150"/>
+            <a:lvl9pPr marL="12959608" indent="0">
+              <a:buNone/>
+              <a:defRPr sz="3543"/>
             </a:lvl9pPr>
           </a:lstStyle>
           <a:p>
@@ -2105,9 +2096,9 @@
           <a:bodyPr/>
           <a:lstStyle/>
           <a:p>
-            <a:fld id="{C063C3BB-6D71-4B0B-AC40-9EA013683E11}" type="datetimeFigureOut">
+            <a:fld id="{3498CC9A-6EF8-4CC1-99DE-9957FB4ED3A6}" type="datetimeFigureOut">
               <a:rPr lang="es-MX" smtClean="0"/>
-              <a:t>26/02/26</a:t>
+              <a:t>04/03/26</a:t>
             </a:fld>
             <a:endParaRPr lang="es-MX"/>
           </a:p>
@@ -2147,7 +2138,7 @@
           <a:bodyPr/>
           <a:lstStyle/>
           <a:p>
-            <a:fld id="{AFD07E46-D442-4EDD-B2A5-4E989111785B}" type="slidenum">
+            <a:fld id="{4A480BF9-F426-49F0-850A-28B43F6EB11F}" type="slidenum">
               <a:rPr lang="es-MX" smtClean="0"/>
               <a:t>‹Nº›</a:t>
             </a:fld>
@@ -2158,7 +2149,7 @@
     </p:spTree>
     <p:extLst>
       <p:ext uri="{BB962C8B-B14F-4D97-AF65-F5344CB8AC3E}">
-        <p14:creationId xmlns:p14="http://schemas.microsoft.com/office/powerpoint/2010/main" val="1634648912"/>
+        <p14:creationId xmlns:p14="http://schemas.microsoft.com/office/powerpoint/2010/main" val="895363187"/>
       </p:ext>
     </p:extLst>
   </p:cSld>
@@ -2197,15 +2188,15 @@
         </p:nvSpPr>
         <p:spPr>
           <a:xfrm>
-            <a:off x="1983780" y="2640012"/>
-            <a:ext cx="9288887" cy="9240044"/>
+            <a:off x="2231671" y="2880042"/>
+            <a:ext cx="10449614" cy="10080149"/>
           </a:xfrm>
         </p:spPr>
         <p:txBody>
           <a:bodyPr anchor="b"/>
           <a:lstStyle>
             <a:lvl1pPr>
-              <a:defRPr sz="10079"/>
+              <a:defRPr sz="11338"/>
             </a:lvl1pPr>
           </a:lstStyle>
           <a:p>
@@ -2229,8 +2220,8 @@
         </p:nvSpPr>
         <p:spPr>
           <a:xfrm>
-            <a:off x="12243932" y="5701703"/>
-            <a:ext cx="14580215" cy="28141800"/>
+            <a:off x="13773917" y="6220102"/>
+            <a:ext cx="16402140" cy="30700453"/>
           </a:xfrm>
         </p:spPr>
         <p:txBody>
@@ -2238,39 +2229,39 @@
           <a:lstStyle>
             <a:lvl1pPr marL="0" indent="0">
               <a:buNone/>
-              <a:defRPr sz="10079"/>
+              <a:defRPr sz="11338"/>
             </a:lvl1pPr>
-            <a:lvl2pPr marL="1440043" indent="0">
-              <a:buNone/>
-              <a:defRPr sz="8819"/>
+            <a:lvl2pPr marL="1619951" indent="0">
+              <a:buNone/>
+              <a:defRPr sz="9921"/>
             </a:lvl2pPr>
-            <a:lvl3pPr marL="2880086" indent="0">
-              <a:buNone/>
-              <a:defRPr sz="7559"/>
+            <a:lvl3pPr marL="3239902" indent="0">
+              <a:buNone/>
+              <a:defRPr sz="8504"/>
             </a:lvl3pPr>
-            <a:lvl4pPr marL="4320129" indent="0">
-              <a:buNone/>
-              <a:defRPr sz="6299"/>
+            <a:lvl4pPr marL="4859853" indent="0">
+              <a:buNone/>
+              <a:defRPr sz="7086"/>
             </a:lvl4pPr>
-            <a:lvl5pPr marL="5760171" indent="0">
-              <a:buNone/>
-              <a:defRPr sz="6299"/>
+            <a:lvl5pPr marL="6479804" indent="0">
+              <a:buNone/>
+              <a:defRPr sz="7086"/>
             </a:lvl5pPr>
-            <a:lvl6pPr marL="7200214" indent="0">
-              <a:buNone/>
-              <a:defRPr sz="6299"/>
+            <a:lvl6pPr marL="8099755" indent="0">
+              <a:buNone/>
+              <a:defRPr sz="7086"/>
             </a:lvl6pPr>
-            <a:lvl7pPr marL="8640257" indent="0">
-              <a:buNone/>
-              <a:defRPr sz="6299"/>
+            <a:lvl7pPr marL="9719706" indent="0">
+              <a:buNone/>
+              <a:defRPr sz="7086"/>
             </a:lvl7pPr>
-            <a:lvl8pPr marL="10080300" indent="0">
-              <a:buNone/>
-              <a:defRPr sz="6299"/>
+            <a:lvl8pPr marL="11339657" indent="0">
+              <a:buNone/>
+              <a:defRPr sz="7086"/>
             </a:lvl8pPr>
-            <a:lvl9pPr marL="11520343" indent="0">
-              <a:buNone/>
-              <a:defRPr sz="6299"/>
+            <a:lvl9pPr marL="12959608" indent="0">
+              <a:buNone/>
+              <a:defRPr sz="7086"/>
             </a:lvl9pPr>
           </a:lstStyle>
           <a:p>
@@ -2294,8 +2285,8 @@
         </p:nvSpPr>
         <p:spPr>
           <a:xfrm>
-            <a:off x="1983780" y="11880056"/>
-            <a:ext cx="9288887" cy="22009274"/>
+            <a:off x="2231671" y="12960191"/>
+            <a:ext cx="10449614" cy="24010358"/>
           </a:xfrm>
         </p:spPr>
         <p:txBody>
@@ -2303,39 +2294,39 @@
           <a:lstStyle>
             <a:lvl1pPr marL="0" indent="0">
               <a:buNone/>
-              <a:defRPr sz="5040"/>
+              <a:defRPr sz="5669"/>
             </a:lvl1pPr>
-            <a:lvl2pPr marL="1440043" indent="0">
-              <a:buNone/>
-              <a:defRPr sz="4410"/>
+            <a:lvl2pPr marL="1619951" indent="0">
+              <a:buNone/>
+              <a:defRPr sz="4960"/>
             </a:lvl2pPr>
-            <a:lvl3pPr marL="2880086" indent="0">
-              <a:buNone/>
-              <a:defRPr sz="3780"/>
+            <a:lvl3pPr marL="3239902" indent="0">
+              <a:buNone/>
+              <a:defRPr sz="4252"/>
             </a:lvl3pPr>
-            <a:lvl4pPr marL="4320129" indent="0">
-              <a:buNone/>
-              <a:defRPr sz="3150"/>
+            <a:lvl4pPr marL="4859853" indent="0">
+              <a:buNone/>
+              <a:defRPr sz="3543"/>
             </a:lvl4pPr>
-            <a:lvl5pPr marL="5760171" indent="0">
-              <a:buNone/>
-              <a:defRPr sz="3150"/>
+            <a:lvl5pPr marL="6479804" indent="0">
+              <a:buNone/>
+              <a:defRPr sz="3543"/>
             </a:lvl5pPr>
-            <a:lvl6pPr marL="7200214" indent="0">
-              <a:buNone/>
-              <a:defRPr sz="3150"/>
+            <a:lvl6pPr marL="8099755" indent="0">
+              <a:buNone/>
+              <a:defRPr sz="3543"/>
             </a:lvl6pPr>
-            <a:lvl7pPr marL="8640257" indent="0">
-              <a:buNone/>
-              <a:defRPr sz="3150"/>
+            <a:lvl7pPr marL="9719706" indent="0">
+              <a:buNone/>
+              <a:defRPr sz="3543"/>
             </a:lvl7pPr>
-            <a:lvl8pPr marL="10080300" indent="0">
-              <a:buNone/>
-              <a:defRPr sz="3150"/>
+            <a:lvl8pPr marL="11339657" indent="0">
+              <a:buNone/>
+              <a:defRPr sz="3543"/>
             </a:lvl8pPr>
-            <a:lvl9pPr marL="11520343" indent="0">
-              <a:buNone/>
-              <a:defRPr sz="3150"/>
+            <a:lvl9pPr marL="12959608" indent="0">
+              <a:buNone/>
+              <a:defRPr sz="3543"/>
             </a:lvl9pPr>
           </a:lstStyle>
           <a:p>
@@ -2362,9 +2353,9 @@
           <a:bodyPr/>
           <a:lstStyle/>
           <a:p>
-            <a:fld id="{C063C3BB-6D71-4B0B-AC40-9EA013683E11}" type="datetimeFigureOut">
+            <a:fld id="{3498CC9A-6EF8-4CC1-99DE-9957FB4ED3A6}" type="datetimeFigureOut">
               <a:rPr lang="es-MX" smtClean="0"/>
-              <a:t>26/02/26</a:t>
+              <a:t>04/03/26</a:t>
             </a:fld>
             <a:endParaRPr lang="es-MX"/>
           </a:p>
@@ -2404,7 +2395,7 @@
           <a:bodyPr/>
           <a:lstStyle/>
           <a:p>
-            <a:fld id="{AFD07E46-D442-4EDD-B2A5-4E989111785B}" type="slidenum">
+            <a:fld id="{4A480BF9-F426-49F0-850A-28B43F6EB11F}" type="slidenum">
               <a:rPr lang="es-MX" smtClean="0"/>
               <a:t>‹Nº›</a:t>
             </a:fld>
@@ -2415,7 +2406,7 @@
     </p:spTree>
     <p:extLst>
       <p:ext uri="{BB962C8B-B14F-4D97-AF65-F5344CB8AC3E}">
-        <p14:creationId xmlns:p14="http://schemas.microsoft.com/office/powerpoint/2010/main" val="287391420"/>
+        <p14:creationId xmlns:p14="http://schemas.microsoft.com/office/powerpoint/2010/main" val="296362664"/>
       </p:ext>
     </p:extLst>
   </p:cSld>
@@ -2459,8 +2450,8 @@
         </p:nvSpPr>
         <p:spPr>
           <a:xfrm>
-            <a:off x="1980029" y="2108352"/>
-            <a:ext cx="24840367" cy="7654206"/>
+            <a:off x="2227451" y="2300044"/>
+            <a:ext cx="27944386" cy="8350126"/>
           </a:xfrm>
           <a:prstGeom prst="rect">
             <a:avLst/>
@@ -2492,8 +2483,8 @@
         </p:nvSpPr>
         <p:spPr>
           <a:xfrm>
-            <a:off x="1980029" y="10541716"/>
-            <a:ext cx="24840367" cy="25125956"/>
+            <a:off x="2227451" y="11500170"/>
+            <a:ext cx="27944386" cy="27410408"/>
           </a:xfrm>
           <a:prstGeom prst="rect">
             <a:avLst/>
@@ -2554,8 +2545,8 @@
         </p:nvSpPr>
         <p:spPr>
           <a:xfrm>
-            <a:off x="1980029" y="36703516"/>
-            <a:ext cx="6480096" cy="2108343"/>
+            <a:off x="2227451" y="40040601"/>
+            <a:ext cx="7289840" cy="2300034"/>
           </a:xfrm>
           <a:prstGeom prst="rect">
             <a:avLst/>
@@ -2565,19 +2556,19 @@
           <a:bodyPr vert="horz" lIns="91440" tIns="45720" rIns="91440" bIns="45720" rtlCol="0" anchor="ctr"/>
           <a:lstStyle>
             <a:lvl1pPr algn="l">
-              <a:defRPr sz="3780">
+              <a:defRPr sz="4252">
                 <a:solidFill>
                   <a:schemeClr val="tx1">
-                    <a:tint val="75000"/>
+                    <a:tint val="82000"/>
                   </a:schemeClr>
                 </a:solidFill>
               </a:defRPr>
             </a:lvl1pPr>
           </a:lstStyle>
           <a:p>
-            <a:fld id="{C063C3BB-6D71-4B0B-AC40-9EA013683E11}" type="datetimeFigureOut">
+            <a:fld id="{3498CC9A-6EF8-4CC1-99DE-9957FB4ED3A6}" type="datetimeFigureOut">
               <a:rPr lang="es-MX" smtClean="0"/>
-              <a:t>26/02/26</a:t>
+              <a:t>04/03/26</a:t>
             </a:fld>
             <a:endParaRPr lang="es-MX"/>
           </a:p>
@@ -2595,8 +2586,8 @@
         </p:nvSpPr>
         <p:spPr>
           <a:xfrm>
-            <a:off x="9540141" y="36703516"/>
-            <a:ext cx="9720143" cy="2108343"/>
+            <a:off x="10732264" y="40040601"/>
+            <a:ext cx="10934760" cy="2300034"/>
           </a:xfrm>
           <a:prstGeom prst="rect">
             <a:avLst/>
@@ -2606,10 +2597,10 @@
           <a:bodyPr vert="horz" lIns="91440" tIns="45720" rIns="91440" bIns="45720" rtlCol="0" anchor="ctr"/>
           <a:lstStyle>
             <a:lvl1pPr algn="ctr">
-              <a:defRPr sz="3780">
+              <a:defRPr sz="4252">
                 <a:solidFill>
                   <a:schemeClr val="tx1">
-                    <a:tint val="75000"/>
+                    <a:tint val="82000"/>
                   </a:schemeClr>
                 </a:solidFill>
               </a:defRPr>
@@ -2632,8 +2623,8 @@
         </p:nvSpPr>
         <p:spPr>
           <a:xfrm>
-            <a:off x="20340300" y="36703516"/>
-            <a:ext cx="6480096" cy="2108343"/>
+            <a:off x="22881997" y="40040601"/>
+            <a:ext cx="7289840" cy="2300034"/>
           </a:xfrm>
           <a:prstGeom prst="rect">
             <a:avLst/>
@@ -2643,17 +2634,17 @@
           <a:bodyPr vert="horz" lIns="91440" tIns="45720" rIns="91440" bIns="45720" rtlCol="0" anchor="ctr"/>
           <a:lstStyle>
             <a:lvl1pPr algn="r">
-              <a:defRPr sz="3780">
+              <a:defRPr sz="4252">
                 <a:solidFill>
                   <a:schemeClr val="tx1">
-                    <a:tint val="75000"/>
+                    <a:tint val="82000"/>
                   </a:schemeClr>
                 </a:solidFill>
               </a:defRPr>
             </a:lvl1pPr>
           </a:lstStyle>
           <a:p>
-            <a:fld id="{AFD07E46-D442-4EDD-B2A5-4E989111785B}" type="slidenum">
+            <a:fld id="{4A480BF9-F426-49F0-850A-28B43F6EB11F}" type="slidenum">
               <a:rPr lang="es-MX" smtClean="0"/>
               <a:t>‹Nº›</a:t>
             </a:fld>
@@ -2664,27 +2655,27 @@
     </p:spTree>
     <p:extLst>
       <p:ext uri="{BB962C8B-B14F-4D97-AF65-F5344CB8AC3E}">
-        <p14:creationId xmlns:p14="http://schemas.microsoft.com/office/powerpoint/2010/main" val="1867667126"/>
+        <p14:creationId xmlns:p14="http://schemas.microsoft.com/office/powerpoint/2010/main" val="3979201113"/>
       </p:ext>
     </p:extLst>
   </p:cSld>
   <p:clrMap bg1="lt1" tx1="dk1" bg2="lt2" tx2="dk2" accent1="accent1" accent2="accent2" accent3="accent3" accent4="accent4" accent5="accent5" accent6="accent6" hlink="hlink" folHlink="folHlink"/>
   <p:sldLayoutIdLst>
-    <p:sldLayoutId id="2147483673" r:id="rId1"/>
-    <p:sldLayoutId id="2147483674" r:id="rId2"/>
-    <p:sldLayoutId id="2147483675" r:id="rId3"/>
-    <p:sldLayoutId id="2147483676" r:id="rId4"/>
-    <p:sldLayoutId id="2147483677" r:id="rId5"/>
-    <p:sldLayoutId id="2147483678" r:id="rId6"/>
-    <p:sldLayoutId id="2147483679" r:id="rId7"/>
-    <p:sldLayoutId id="2147483680" r:id="rId8"/>
-    <p:sldLayoutId id="2147483681" r:id="rId9"/>
-    <p:sldLayoutId id="2147483682" r:id="rId10"/>
-    <p:sldLayoutId id="2147483683" r:id="rId11"/>
+    <p:sldLayoutId id="2147483661" r:id="rId1"/>
+    <p:sldLayoutId id="2147483662" r:id="rId2"/>
+    <p:sldLayoutId id="2147483663" r:id="rId3"/>
+    <p:sldLayoutId id="2147483664" r:id="rId4"/>
+    <p:sldLayoutId id="2147483665" r:id="rId5"/>
+    <p:sldLayoutId id="2147483666" r:id="rId6"/>
+    <p:sldLayoutId id="2147483667" r:id="rId7"/>
+    <p:sldLayoutId id="2147483668" r:id="rId8"/>
+    <p:sldLayoutId id="2147483669" r:id="rId9"/>
+    <p:sldLayoutId id="2147483670" r:id="rId10"/>
+    <p:sldLayoutId id="2147483671" r:id="rId11"/>
   </p:sldLayoutIdLst>
   <p:txStyles>
     <p:titleStyle>
-      <a:lvl1pPr algn="l" defTabSz="2880086" rtl="0" eaLnBrk="1" latinLnBrk="0" hangingPunct="1">
+      <a:lvl1pPr algn="l" defTabSz="3239902" rtl="0" eaLnBrk="1" latinLnBrk="0" hangingPunct="1">
         <a:lnSpc>
           <a:spcPct val="90000"/>
         </a:lnSpc>
@@ -2692,7 +2683,7 @@
           <a:spcPct val="0"/>
         </a:spcBef>
         <a:buNone/>
-        <a:defRPr sz="13859" kern="1200">
+        <a:defRPr sz="15590" kern="1200">
           <a:solidFill>
             <a:schemeClr val="tx1"/>
           </a:solidFill>
@@ -2703,16 +2694,16 @@
       </a:lvl1pPr>
     </p:titleStyle>
     <p:bodyStyle>
-      <a:lvl1pPr marL="720021" indent="-720021" algn="l" defTabSz="2880086" rtl="0" eaLnBrk="1" latinLnBrk="0" hangingPunct="1">
+      <a:lvl1pPr marL="809976" indent="-809976" algn="l" defTabSz="3239902" rtl="0" eaLnBrk="1" latinLnBrk="0" hangingPunct="1">
         <a:lnSpc>
           <a:spcPct val="90000"/>
         </a:lnSpc>
         <a:spcBef>
-          <a:spcPts val="3150"/>
+          <a:spcPts val="3543"/>
         </a:spcBef>
         <a:buFont typeface="Arial" panose="020B0604020202020204" pitchFamily="34" charset="0"/>
         <a:buChar char="•"/>
-        <a:defRPr sz="8819" kern="1200">
+        <a:defRPr sz="9921" kern="1200">
           <a:solidFill>
             <a:schemeClr val="tx1"/>
           </a:solidFill>
@@ -2721,16 +2712,16 @@
           <a:cs typeface="+mn-cs"/>
         </a:defRPr>
       </a:lvl1pPr>
-      <a:lvl2pPr marL="2160064" indent="-720021" algn="l" defTabSz="2880086" rtl="0" eaLnBrk="1" latinLnBrk="0" hangingPunct="1">
+      <a:lvl2pPr marL="2429927" indent="-809976" algn="l" defTabSz="3239902" rtl="0" eaLnBrk="1" latinLnBrk="0" hangingPunct="1">
         <a:lnSpc>
           <a:spcPct val="90000"/>
         </a:lnSpc>
         <a:spcBef>
-          <a:spcPts val="1575"/>
+          <a:spcPts val="1772"/>
         </a:spcBef>
         <a:buFont typeface="Arial" panose="020B0604020202020204" pitchFamily="34" charset="0"/>
         <a:buChar char="•"/>
-        <a:defRPr sz="7559" kern="1200">
+        <a:defRPr sz="8504" kern="1200">
           <a:solidFill>
             <a:schemeClr val="tx1"/>
           </a:solidFill>
@@ -2739,16 +2730,16 @@
           <a:cs typeface="+mn-cs"/>
         </a:defRPr>
       </a:lvl2pPr>
-      <a:lvl3pPr marL="3600107" indent="-720021" algn="l" defTabSz="2880086" rtl="0" eaLnBrk="1" latinLnBrk="0" hangingPunct="1">
+      <a:lvl3pPr marL="4049878" indent="-809976" algn="l" defTabSz="3239902" rtl="0" eaLnBrk="1" latinLnBrk="0" hangingPunct="1">
         <a:lnSpc>
           <a:spcPct val="90000"/>
         </a:lnSpc>
         <a:spcBef>
-          <a:spcPts val="1575"/>
+          <a:spcPts val="1772"/>
         </a:spcBef>
         <a:buFont typeface="Arial" panose="020B0604020202020204" pitchFamily="34" charset="0"/>
         <a:buChar char="•"/>
-        <a:defRPr sz="6299" kern="1200">
+        <a:defRPr sz="7086" kern="1200">
           <a:solidFill>
             <a:schemeClr val="tx1"/>
           </a:solidFill>
@@ -2757,16 +2748,16 @@
           <a:cs typeface="+mn-cs"/>
         </a:defRPr>
       </a:lvl3pPr>
-      <a:lvl4pPr marL="5040150" indent="-720021" algn="l" defTabSz="2880086" rtl="0" eaLnBrk="1" latinLnBrk="0" hangingPunct="1">
+      <a:lvl4pPr marL="5669829" indent="-809976" algn="l" defTabSz="3239902" rtl="0" eaLnBrk="1" latinLnBrk="0" hangingPunct="1">
         <a:lnSpc>
           <a:spcPct val="90000"/>
         </a:lnSpc>
         <a:spcBef>
-          <a:spcPts val="1575"/>
+          <a:spcPts val="1772"/>
         </a:spcBef>
         <a:buFont typeface="Arial" panose="020B0604020202020204" pitchFamily="34" charset="0"/>
         <a:buChar char="•"/>
-        <a:defRPr sz="5669" kern="1200">
+        <a:defRPr sz="6378" kern="1200">
           <a:solidFill>
             <a:schemeClr val="tx1"/>
           </a:solidFill>
@@ -2775,16 +2766,16 @@
           <a:cs typeface="+mn-cs"/>
         </a:defRPr>
       </a:lvl4pPr>
-      <a:lvl5pPr marL="6480193" indent="-720021" algn="l" defTabSz="2880086" rtl="0" eaLnBrk="1" latinLnBrk="0" hangingPunct="1">
+      <a:lvl5pPr marL="7289780" indent="-809976" algn="l" defTabSz="3239902" rtl="0" eaLnBrk="1" latinLnBrk="0" hangingPunct="1">
         <a:lnSpc>
           <a:spcPct val="90000"/>
         </a:lnSpc>
         <a:spcBef>
-          <a:spcPts val="1575"/>
+          <a:spcPts val="1772"/>
         </a:spcBef>
         <a:buFont typeface="Arial" panose="020B0604020202020204" pitchFamily="34" charset="0"/>
         <a:buChar char="•"/>
-        <a:defRPr sz="5669" kern="1200">
+        <a:defRPr sz="6378" kern="1200">
           <a:solidFill>
             <a:schemeClr val="tx1"/>
           </a:solidFill>
@@ -2793,16 +2784,16 @@
           <a:cs typeface="+mn-cs"/>
         </a:defRPr>
       </a:lvl5pPr>
-      <a:lvl6pPr marL="7920236" indent="-720021" algn="l" defTabSz="2880086" rtl="0" eaLnBrk="1" latinLnBrk="0" hangingPunct="1">
+      <a:lvl6pPr marL="8909731" indent="-809976" algn="l" defTabSz="3239902" rtl="0" eaLnBrk="1" latinLnBrk="0" hangingPunct="1">
         <a:lnSpc>
           <a:spcPct val="90000"/>
         </a:lnSpc>
         <a:spcBef>
-          <a:spcPts val="1575"/>
+          <a:spcPts val="1772"/>
         </a:spcBef>
         <a:buFont typeface="Arial" panose="020B0604020202020204" pitchFamily="34" charset="0"/>
         <a:buChar char="•"/>
-        <a:defRPr sz="5669" kern="1200">
+        <a:defRPr sz="6378" kern="1200">
           <a:solidFill>
             <a:schemeClr val="tx1"/>
           </a:solidFill>
@@ -2811,16 +2802,16 @@
           <a:cs typeface="+mn-cs"/>
         </a:defRPr>
       </a:lvl6pPr>
-      <a:lvl7pPr marL="9360278" indent="-720021" algn="l" defTabSz="2880086" rtl="0" eaLnBrk="1" latinLnBrk="0" hangingPunct="1">
+      <a:lvl7pPr marL="10529682" indent="-809976" algn="l" defTabSz="3239902" rtl="0" eaLnBrk="1" latinLnBrk="0" hangingPunct="1">
         <a:lnSpc>
           <a:spcPct val="90000"/>
         </a:lnSpc>
         <a:spcBef>
-          <a:spcPts val="1575"/>
+          <a:spcPts val="1772"/>
         </a:spcBef>
         <a:buFont typeface="Arial" panose="020B0604020202020204" pitchFamily="34" charset="0"/>
         <a:buChar char="•"/>
-        <a:defRPr sz="5669" kern="1200">
+        <a:defRPr sz="6378" kern="1200">
           <a:solidFill>
             <a:schemeClr val="tx1"/>
           </a:solidFill>
@@ -2829,16 +2820,16 @@
           <a:cs typeface="+mn-cs"/>
         </a:defRPr>
       </a:lvl7pPr>
-      <a:lvl8pPr marL="10800321" indent="-720021" algn="l" defTabSz="2880086" rtl="0" eaLnBrk="1" latinLnBrk="0" hangingPunct="1">
+      <a:lvl8pPr marL="12149633" indent="-809976" algn="l" defTabSz="3239902" rtl="0" eaLnBrk="1" latinLnBrk="0" hangingPunct="1">
         <a:lnSpc>
           <a:spcPct val="90000"/>
         </a:lnSpc>
         <a:spcBef>
-          <a:spcPts val="1575"/>
+          <a:spcPts val="1772"/>
         </a:spcBef>
         <a:buFont typeface="Arial" panose="020B0604020202020204" pitchFamily="34" charset="0"/>
         <a:buChar char="•"/>
-        <a:defRPr sz="5669" kern="1200">
+        <a:defRPr sz="6378" kern="1200">
           <a:solidFill>
             <a:schemeClr val="tx1"/>
           </a:solidFill>
@@ -2847,16 +2838,16 @@
           <a:cs typeface="+mn-cs"/>
         </a:defRPr>
       </a:lvl8pPr>
-      <a:lvl9pPr marL="12240364" indent="-720021" algn="l" defTabSz="2880086" rtl="0" eaLnBrk="1" latinLnBrk="0" hangingPunct="1">
+      <a:lvl9pPr marL="13769584" indent="-809976" algn="l" defTabSz="3239902" rtl="0" eaLnBrk="1" latinLnBrk="0" hangingPunct="1">
         <a:lnSpc>
           <a:spcPct val="90000"/>
         </a:lnSpc>
         <a:spcBef>
-          <a:spcPts val="1575"/>
+          <a:spcPts val="1772"/>
         </a:spcBef>
         <a:buFont typeface="Arial" panose="020B0604020202020204" pitchFamily="34" charset="0"/>
         <a:buChar char="•"/>
-        <a:defRPr sz="5669" kern="1200">
+        <a:defRPr sz="6378" kern="1200">
           <a:solidFill>
             <a:schemeClr val="tx1"/>
           </a:solidFill>
@@ -2870,8 +2861,8 @@
       <a:defPPr>
         <a:defRPr lang="en-US"/>
       </a:defPPr>
-      <a:lvl1pPr marL="0" algn="l" defTabSz="2880086" rtl="0" eaLnBrk="1" latinLnBrk="0" hangingPunct="1">
-        <a:defRPr sz="5669" kern="1200">
+      <a:lvl1pPr marL="0" algn="l" defTabSz="3239902" rtl="0" eaLnBrk="1" latinLnBrk="0" hangingPunct="1">
+        <a:defRPr sz="6378" kern="1200">
           <a:solidFill>
             <a:schemeClr val="tx1"/>
           </a:solidFill>
@@ -2880,8 +2871,8 @@
           <a:cs typeface="+mn-cs"/>
         </a:defRPr>
       </a:lvl1pPr>
-      <a:lvl2pPr marL="1440043" algn="l" defTabSz="2880086" rtl="0" eaLnBrk="1" latinLnBrk="0" hangingPunct="1">
-        <a:defRPr sz="5669" kern="1200">
+      <a:lvl2pPr marL="1619951" algn="l" defTabSz="3239902" rtl="0" eaLnBrk="1" latinLnBrk="0" hangingPunct="1">
+        <a:defRPr sz="6378" kern="1200">
           <a:solidFill>
             <a:schemeClr val="tx1"/>
           </a:solidFill>
@@ -2890,8 +2881,8 @@
           <a:cs typeface="+mn-cs"/>
         </a:defRPr>
       </a:lvl2pPr>
-      <a:lvl3pPr marL="2880086" algn="l" defTabSz="2880086" rtl="0" eaLnBrk="1" latinLnBrk="0" hangingPunct="1">
-        <a:defRPr sz="5669" kern="1200">
+      <a:lvl3pPr marL="3239902" algn="l" defTabSz="3239902" rtl="0" eaLnBrk="1" latinLnBrk="0" hangingPunct="1">
+        <a:defRPr sz="6378" kern="1200">
           <a:solidFill>
             <a:schemeClr val="tx1"/>
           </a:solidFill>
@@ -2900,8 +2891,8 @@
           <a:cs typeface="+mn-cs"/>
         </a:defRPr>
       </a:lvl3pPr>
-      <a:lvl4pPr marL="4320129" algn="l" defTabSz="2880086" rtl="0" eaLnBrk="1" latinLnBrk="0" hangingPunct="1">
-        <a:defRPr sz="5669" kern="1200">
+      <a:lvl4pPr marL="4859853" algn="l" defTabSz="3239902" rtl="0" eaLnBrk="1" latinLnBrk="0" hangingPunct="1">
+        <a:defRPr sz="6378" kern="1200">
           <a:solidFill>
             <a:schemeClr val="tx1"/>
           </a:solidFill>
@@ -2910,8 +2901,8 @@
           <a:cs typeface="+mn-cs"/>
         </a:defRPr>
       </a:lvl4pPr>
-      <a:lvl5pPr marL="5760171" algn="l" defTabSz="2880086" rtl="0" eaLnBrk="1" latinLnBrk="0" hangingPunct="1">
-        <a:defRPr sz="5669" kern="1200">
+      <a:lvl5pPr marL="6479804" algn="l" defTabSz="3239902" rtl="0" eaLnBrk="1" latinLnBrk="0" hangingPunct="1">
+        <a:defRPr sz="6378" kern="1200">
           <a:solidFill>
             <a:schemeClr val="tx1"/>
           </a:solidFill>
@@ -2920,8 +2911,8 @@
           <a:cs typeface="+mn-cs"/>
         </a:defRPr>
       </a:lvl5pPr>
-      <a:lvl6pPr marL="7200214" algn="l" defTabSz="2880086" rtl="0" eaLnBrk="1" latinLnBrk="0" hangingPunct="1">
-        <a:defRPr sz="5669" kern="1200">
+      <a:lvl6pPr marL="8099755" algn="l" defTabSz="3239902" rtl="0" eaLnBrk="1" latinLnBrk="0" hangingPunct="1">
+        <a:defRPr sz="6378" kern="1200">
           <a:solidFill>
             <a:schemeClr val="tx1"/>
           </a:solidFill>
@@ -2930,8 +2921,8 @@
           <a:cs typeface="+mn-cs"/>
         </a:defRPr>
       </a:lvl6pPr>
-      <a:lvl7pPr marL="8640257" algn="l" defTabSz="2880086" rtl="0" eaLnBrk="1" latinLnBrk="0" hangingPunct="1">
-        <a:defRPr sz="5669" kern="1200">
+      <a:lvl7pPr marL="9719706" algn="l" defTabSz="3239902" rtl="0" eaLnBrk="1" latinLnBrk="0" hangingPunct="1">
+        <a:defRPr sz="6378" kern="1200">
           <a:solidFill>
             <a:schemeClr val="tx1"/>
           </a:solidFill>
@@ -2940,8 +2931,8 @@
           <a:cs typeface="+mn-cs"/>
         </a:defRPr>
       </a:lvl7pPr>
-      <a:lvl8pPr marL="10080300" algn="l" defTabSz="2880086" rtl="0" eaLnBrk="1" latinLnBrk="0" hangingPunct="1">
-        <a:defRPr sz="5669" kern="1200">
+      <a:lvl8pPr marL="11339657" algn="l" defTabSz="3239902" rtl="0" eaLnBrk="1" latinLnBrk="0" hangingPunct="1">
+        <a:defRPr sz="6378" kern="1200">
           <a:solidFill>
             <a:schemeClr val="tx1"/>
           </a:solidFill>
@@ -2950,8 +2941,8 @@
           <a:cs typeface="+mn-cs"/>
         </a:defRPr>
       </a:lvl8pPr>
-      <a:lvl9pPr marL="11520343" algn="l" defTabSz="2880086" rtl="0" eaLnBrk="1" latinLnBrk="0" hangingPunct="1">
-        <a:defRPr sz="5669" kern="1200">
+      <a:lvl9pPr marL="12959608" algn="l" defTabSz="3239902" rtl="0" eaLnBrk="1" latinLnBrk="0" hangingPunct="1">
+        <a:defRPr sz="6378" kern="1200">
           <a:solidFill>
             <a:schemeClr val="tx1"/>
           </a:solidFill>
@@ -2984,10 +2975,10 @@
       </p:grpSpPr>
       <p:pic>
         <p:nvPicPr>
-          <p:cNvPr id="16" name="Image 1">
+          <p:cNvPr id="3" name="Imagen 2">
             <a:extLst>
               <a:ext uri="{FF2B5EF4-FFF2-40B4-BE49-F238E27FC236}">
-                <a16:creationId xmlns:a16="http://schemas.microsoft.com/office/drawing/2014/main" id="{4DD732A6-A549-56D3-A86E-F26E865C4D4A}"/>
+                <a16:creationId xmlns:a16="http://schemas.microsoft.com/office/drawing/2014/main" id="{4EC7FF9E-C0BA-88D2-F4EA-15ACFD029541}"/>
               </a:ext>
             </a:extLst>
           </p:cNvPr>
@@ -2996,83 +2987,34 @@
           </p:cNvPicPr>
           <p:nvPr/>
         </p:nvPicPr>
-        <p:blipFill rotWithShape="1">
-          <a:blip r:embed="rId2" cstate="print">
+        <p:blipFill>
+          <a:blip r:embed="rId2">
             <a:extLst>
               <a:ext uri="{28A0092B-C50C-407E-A947-70E740481C1C}">
                 <a14:useLocalDpi xmlns:a14="http://schemas.microsoft.com/office/drawing/2010/main" val="0"/>
               </a:ext>
             </a:extLst>
           </a:blip>
-          <a:srcRect t="84772"/>
-          <a:stretch/>
+          <a:stretch>
+            <a:fillRect/>
+          </a:stretch>
         </p:blipFill>
-        <p:spPr bwMode="auto">
+        <p:spPr>
           <a:xfrm>
-            <a:off x="667617" y="34575600"/>
-            <a:ext cx="27773180" cy="4576968"/>
+            <a:off x="333" y="207523"/>
+            <a:ext cx="32398955" cy="43200638"/>
           </a:xfrm>
           <a:prstGeom prst="rect">
             <a:avLst/>
           </a:prstGeom>
-          <a:ln>
-            <a:noFill/>
-          </a:ln>
-          <a:extLst>
-            <a:ext uri="{53640926-AAD7-44D8-BBD7-CCE9431645EC}">
-              <a14:shadowObscured xmlns:a14="http://schemas.microsoft.com/office/drawing/2010/main"/>
-            </a:ext>
-          </a:extLst>
         </p:spPr>
       </p:pic>
       <p:sp>
         <p:nvSpPr>
-          <p:cNvPr id="13" name="Rectángulo 12"/>
-          <p:cNvSpPr/>
-          <p:nvPr/>
-        </p:nvSpPr>
-        <p:spPr>
-          <a:xfrm>
-            <a:off x="667617" y="6048158"/>
-            <a:ext cx="27082963" cy="2172359"/>
-          </a:xfrm>
-          <a:prstGeom prst="rect">
-            <a:avLst/>
-          </a:prstGeom>
-          <a:ln>
-            <a:noFill/>
-          </a:ln>
-        </p:spPr>
-        <p:txBody>
-          <a:bodyPr wrap="square" lIns="322549" tIns="161275" rIns="322549" bIns="161275">
-            <a:spAutoFit/>
-          </a:bodyPr>
-          <a:lstStyle/>
-          <a:p>
-            <a:pPr algn="ctr"/>
-            <a:r>
-              <a:rPr lang="es-MX" sz="6000" b="1" dirty="0">
-                <a:effectLst>
-                  <a:outerShdw blurRad="38100" dist="38100" dir="2700000" algn="tl">
-                    <a:srgbClr val="000000">
-                      <a:alpha val="43137"/>
-                    </a:srgbClr>
-                  </a:outerShdw>
-                </a:effectLst>
-                <a:latin typeface="Arial" panose="020B0604020202020204" pitchFamily="34" charset="0"/>
-                <a:cs typeface="Arial" panose="020B0604020202020204" pitchFamily="34" charset="0"/>
-              </a:rPr>
-              <a:t>Título del trabajo (Arial negrita, tamaño 60, alineación centrada, primera letra mayúscula, resto minúscula, máximo 12 palabras)</a:t>
-            </a:r>
-          </a:p>
-        </p:txBody>
-      </p:sp>
-      <p:sp>
-        <p:nvSpPr>
-          <p:cNvPr id="18" name="CuadroTexto 17">
+          <p:cNvPr id="5" name="CuadroTexto 4">
             <a:extLst>
               <a:ext uri="{FF2B5EF4-FFF2-40B4-BE49-F238E27FC236}">
-                <a16:creationId xmlns:a16="http://schemas.microsoft.com/office/drawing/2014/main" id="{4FEA1C27-6334-4A06-A4CF-BBDFC58B46EA}"/>
+                <a16:creationId xmlns:a16="http://schemas.microsoft.com/office/drawing/2014/main" id="{BB93C647-D0DB-9B43-1D05-3DCB14FACE17}"/>
               </a:ext>
             </a:extLst>
           </p:cNvPr>
@@ -3081,8 +3023,8 @@
         </p:nvSpPr>
         <p:spPr>
           <a:xfrm>
-            <a:off x="879355" y="8235255"/>
-            <a:ext cx="26890480" cy="1938992"/>
+            <a:off x="16929032" y="11825966"/>
+            <a:ext cx="13716000" cy="3046988"/>
           </a:xfrm>
           <a:prstGeom prst="rect">
             <a:avLst/>
@@ -3095,150 +3037,102 @@
           </a:bodyPr>
           <a:lstStyle/>
           <a:p>
-            <a:pPr algn="ctr">
-              <a:tabLst>
-                <a:tab pos="2493664" algn="ctr"/>
-                <a:tab pos="4987327" algn="r"/>
-              </a:tabLst>
-            </a:pPr>
-            <a:r>
-              <a:rPr lang="es-ES" sz="4000" b="1" dirty="0">
+            <a:pPr algn="just"/>
+            <a:r>
+              <a:rPr lang="es-ES" sz="3200" dirty="0">
                 <a:latin typeface="Arial" panose="020B0604020202020204" pitchFamily="34" charset="0"/>
-                <a:ea typeface="Times New Roman" panose="02020603050405020304" pitchFamily="18" charset="0"/>
                 <a:cs typeface="Arial" panose="020B0604020202020204" pitchFamily="34" charset="0"/>
               </a:rPr>
-              <a:t>Apellido paterno, AM. N</a:t>
-            </a:r>
-            <a:r>
-              <a:rPr lang="es-ES" sz="4000" baseline="30000" dirty="0">
+              <a:t>Arial 32, justificado. Describir el impacto social de forma clara y las técnicas aplicadas. Citar con números entre corchetes los métodos ya publicados y si fueron modificados, indicando la modificación. Se pueden incluir tablas y figuras, así como las ecuaciones si el autor lo considera oportuno. Las tablas y figuras irán numeradas en orden de aparición, como título las tablas y pie de figuras en las figuras.</a:t>
+            </a:r>
+          </a:p>
+        </p:txBody>
+      </p:sp>
+      <p:sp>
+        <p:nvSpPr>
+          <p:cNvPr id="6" name="CuadroTexto 5">
+            <a:extLst>
+              <a:ext uri="{FF2B5EF4-FFF2-40B4-BE49-F238E27FC236}">
+                <a16:creationId xmlns:a16="http://schemas.microsoft.com/office/drawing/2014/main" id="{8A6F7D9C-AD69-F03E-23B2-96C0D5FAE317}"/>
+              </a:ext>
+            </a:extLst>
+          </p:cNvPr>
+          <p:cNvSpPr txBox="1"/>
+          <p:nvPr/>
+        </p:nvSpPr>
+        <p:spPr>
+          <a:xfrm>
+            <a:off x="1685120" y="18364520"/>
+            <a:ext cx="13657358" cy="584775"/>
+          </a:xfrm>
+          <a:prstGeom prst="rect">
+            <a:avLst/>
+          </a:prstGeom>
+          <a:noFill/>
+        </p:spPr>
+        <p:txBody>
+          <a:bodyPr wrap="square" rtlCol="0">
+            <a:spAutoFit/>
+          </a:bodyPr>
+          <a:lstStyle/>
+          <a:p>
+            <a:pPr algn="just"/>
+            <a:r>
+              <a:rPr lang="es-ES" sz="3200" dirty="0">
                 <a:latin typeface="Arial" panose="020B0604020202020204" pitchFamily="34" charset="0"/>
-                <a:ea typeface="Times New Roman" panose="02020603050405020304" pitchFamily="18" charset="0"/>
                 <a:cs typeface="Arial" panose="020B0604020202020204" pitchFamily="34" charset="0"/>
               </a:rPr>
-              <a:t>1</a:t>
-            </a:r>
-            <a:r>
-              <a:rPr lang="es-ES" sz="4000" dirty="0">
+              <a:t>Arial 32, justificado. Describir el objetivo general del trabajo. </a:t>
+            </a:r>
+          </a:p>
+        </p:txBody>
+      </p:sp>
+      <p:sp>
+        <p:nvSpPr>
+          <p:cNvPr id="10" name="CuadroTexto 9">
+            <a:extLst>
+              <a:ext uri="{FF2B5EF4-FFF2-40B4-BE49-F238E27FC236}">
+                <a16:creationId xmlns:a16="http://schemas.microsoft.com/office/drawing/2014/main" id="{B11B5984-C680-2874-6ED3-451FF921E8D3}"/>
+              </a:ext>
+            </a:extLst>
+          </p:cNvPr>
+          <p:cNvSpPr txBox="1"/>
+          <p:nvPr/>
+        </p:nvSpPr>
+        <p:spPr>
+          <a:xfrm>
+            <a:off x="1685120" y="39864833"/>
+            <a:ext cx="25450225" cy="400110"/>
+          </a:xfrm>
+          <a:prstGeom prst="rect">
+            <a:avLst/>
+          </a:prstGeom>
+          <a:noFill/>
+        </p:spPr>
+        <p:txBody>
+          <a:bodyPr wrap="square" rtlCol="0">
+            <a:spAutoFit/>
+          </a:bodyPr>
+          <a:lstStyle/>
+          <a:p>
+            <a:pPr algn="just"/>
+            <a:r>
+              <a:rPr lang="es-ES" sz="2000" dirty="0">
                 <a:latin typeface="Arial" panose="020B0604020202020204" pitchFamily="34" charset="0"/>
-                <a:ea typeface="Times New Roman" panose="02020603050405020304" pitchFamily="18" charset="0"/>
                 <a:cs typeface="Arial" panose="020B0604020202020204" pitchFamily="34" charset="0"/>
               </a:rPr>
-              <a:t>., </a:t>
-            </a:r>
-            <a:r>
-              <a:rPr lang="es-ES" sz="4000" b="1" dirty="0">
-                <a:latin typeface="Arial" panose="020B0604020202020204" pitchFamily="34" charset="0"/>
-                <a:ea typeface="Times New Roman" panose="02020603050405020304" pitchFamily="18" charset="0"/>
-                <a:cs typeface="Arial" panose="020B0604020202020204" pitchFamily="34" charset="0"/>
-              </a:rPr>
-              <a:t>Apellido paterno, AM. N</a:t>
-            </a:r>
-            <a:r>
-              <a:rPr lang="es-ES" sz="4000" baseline="30000" dirty="0">
-                <a:latin typeface="Arial" panose="020B0604020202020204" pitchFamily="34" charset="0"/>
-                <a:ea typeface="Times New Roman" panose="02020603050405020304" pitchFamily="18" charset="0"/>
-                <a:cs typeface="Arial" panose="020B0604020202020204" pitchFamily="34" charset="0"/>
-              </a:rPr>
-              <a:t>1</a:t>
-            </a:r>
-            <a:r>
-              <a:rPr lang="es-ES" sz="4000" dirty="0">
-                <a:latin typeface="Arial" panose="020B0604020202020204" pitchFamily="34" charset="0"/>
-                <a:ea typeface="Times New Roman" panose="02020603050405020304" pitchFamily="18" charset="0"/>
-                <a:cs typeface="Arial" panose="020B0604020202020204" pitchFamily="34" charset="0"/>
-              </a:rPr>
-              <a:t>., </a:t>
-            </a:r>
-            <a:r>
-              <a:rPr lang="es-ES" sz="4000" b="1" dirty="0">
-                <a:latin typeface="Arial" panose="020B0604020202020204" pitchFamily="34" charset="0"/>
-                <a:ea typeface="Times New Roman" panose="02020603050405020304" pitchFamily="18" charset="0"/>
-                <a:cs typeface="Arial" panose="020B0604020202020204" pitchFamily="34" charset="0"/>
-              </a:rPr>
-              <a:t>Apellido paterno, AM. N</a:t>
-            </a:r>
-            <a:r>
-              <a:rPr lang="es-ES" sz="4000" baseline="30000" dirty="0">
-                <a:latin typeface="Arial" panose="020B0604020202020204" pitchFamily="34" charset="0"/>
-                <a:ea typeface="Times New Roman" panose="02020603050405020304" pitchFamily="18" charset="0"/>
-                <a:cs typeface="Arial" panose="020B0604020202020204" pitchFamily="34" charset="0"/>
-              </a:rPr>
-              <a:t>1</a:t>
-            </a:r>
-            <a:r>
-              <a:rPr lang="es-ES" sz="4000" dirty="0">
-                <a:latin typeface="Arial" panose="020B0604020202020204" pitchFamily="34" charset="0"/>
-                <a:ea typeface="Times New Roman" panose="02020603050405020304" pitchFamily="18" charset="0"/>
-                <a:cs typeface="Arial" panose="020B0604020202020204" pitchFamily="34" charset="0"/>
-              </a:rPr>
-              <a:t>* (Arial 40, centrado)  </a:t>
-            </a:r>
-          </a:p>
-          <a:p>
-            <a:pPr algn="ctr">
-              <a:tabLst>
-                <a:tab pos="2493664" algn="ctr"/>
-                <a:tab pos="4987327" algn="r"/>
-              </a:tabLst>
-            </a:pPr>
-            <a:r>
-              <a:rPr lang="es-ES" sz="4000" baseline="30000" dirty="0">
-                <a:latin typeface="Arial" panose="020B0604020202020204" pitchFamily="34" charset="0"/>
-                <a:ea typeface="Times New Roman" panose="02020603050405020304" pitchFamily="18" charset="0"/>
-                <a:cs typeface="Arial" panose="020B0604020202020204" pitchFamily="34" charset="0"/>
-              </a:rPr>
-              <a:t>1</a:t>
-            </a:r>
-            <a:r>
-              <a:rPr lang="es-ES" sz="4000" dirty="0">
-                <a:latin typeface="Arial" panose="020B0604020202020204" pitchFamily="34" charset="0"/>
-                <a:ea typeface="Times New Roman" panose="02020603050405020304" pitchFamily="18" charset="0"/>
-                <a:cs typeface="Arial" panose="020B0604020202020204" pitchFamily="34" charset="0"/>
-              </a:rPr>
-              <a:t>Filiación institucional sin abreviaturas. Ciudad - País. (Arial 40, centrado)</a:t>
-            </a:r>
-          </a:p>
-          <a:p>
-            <a:pPr algn="ctr">
-              <a:tabLst>
-                <a:tab pos="2493664" algn="ctr"/>
-                <a:tab pos="4987327" algn="r"/>
-              </a:tabLst>
-            </a:pPr>
-            <a:r>
-              <a:rPr lang="es-ES" sz="4000" dirty="0">
-                <a:latin typeface="Arial" panose="020B0604020202020204" pitchFamily="34" charset="0"/>
-                <a:ea typeface="Times New Roman" panose="02020603050405020304" pitchFamily="18" charset="0"/>
-                <a:cs typeface="Arial" panose="020B0604020202020204" pitchFamily="34" charset="0"/>
-              </a:rPr>
-              <a:t>* Autor de correspondencia: </a:t>
-            </a:r>
-            <a:r>
-              <a:rPr lang="es-ES" sz="4000" dirty="0">
-                <a:latin typeface="Arial" panose="020B0604020202020204" pitchFamily="34" charset="0"/>
-                <a:ea typeface="Times New Roman" panose="02020603050405020304" pitchFamily="18" charset="0"/>
-                <a:cs typeface="Arial" panose="020B0604020202020204" pitchFamily="34" charset="0"/>
-                <a:hlinkClick r:id="rId3"/>
-              </a:rPr>
-              <a:t>ejemplo@outlook.com</a:t>
-            </a:r>
-            <a:r>
-              <a:rPr lang="es-ES" sz="4000" dirty="0">
-                <a:latin typeface="Arial" panose="020B0604020202020204" pitchFamily="34" charset="0"/>
-                <a:ea typeface="Times New Roman" panose="02020603050405020304" pitchFamily="18" charset="0"/>
-                <a:cs typeface="Arial" panose="020B0604020202020204" pitchFamily="34" charset="0"/>
-              </a:rPr>
-              <a:t> (Arial 40, centrado)</a:t>
-            </a:r>
-          </a:p>
-        </p:txBody>
-      </p:sp>
-      <p:sp>
-        <p:nvSpPr>
-          <p:cNvPr id="24" name="Rectángulo 23">
+              <a:t>Arial 32, justificado. En esta sección poner las referencias.</a:t>
+            </a:r>
+            <a:endParaRPr lang="es-MX" sz="2000" dirty="0"/>
+          </a:p>
+        </p:txBody>
+      </p:sp>
+      <p:sp>
+        <p:nvSpPr>
+          <p:cNvPr id="12" name="Rectángulo 11">
             <a:extLst>
               <a:ext uri="{FF2B5EF4-FFF2-40B4-BE49-F238E27FC236}">
-                <a16:creationId xmlns:a16="http://schemas.microsoft.com/office/drawing/2014/main" id="{A4FBB4FA-0DF5-5E9C-CB3D-4CF9DC5AA6FA}"/>
+                <a16:creationId xmlns:a16="http://schemas.microsoft.com/office/drawing/2014/main" id="{E2AE4F7C-87D6-8029-BC33-8A8A51F1C715}"/>
               </a:ext>
             </a:extLst>
           </p:cNvPr>
@@ -3247,13 +3141,15 @@
         </p:nvSpPr>
         <p:spPr>
           <a:xfrm>
-            <a:off x="1073874" y="10405486"/>
-            <a:ext cx="13517301" cy="1251856"/>
+            <a:off x="16929032" y="21546368"/>
+            <a:ext cx="5737363" cy="7255826"/>
           </a:xfrm>
           <a:prstGeom prst="rect">
             <a:avLst/>
           </a:prstGeom>
-          <a:noFill/>
+          <a:solidFill>
+            <a:srgbClr val="B8163B"/>
+          </a:solidFill>
           <a:ln>
             <a:noFill/>
           </a:ln>
@@ -3278,36 +3174,27 @@
           <a:bodyPr rtlCol="0" anchor="ctr"/>
           <a:lstStyle/>
           <a:p>
-            <a:r>
-              <a:rPr lang="es-ES" sz="4200" b="1" dirty="0">
-                <a:solidFill>
-                  <a:schemeClr val="accent1">
-                    <a:lumMod val="50000"/>
-                  </a:schemeClr>
-                </a:solidFill>
-                <a:latin typeface="Arial" panose="020B0604020202020204" pitchFamily="34" charset="0"/>
-                <a:cs typeface="Arial" panose="020B0604020202020204" pitchFamily="34" charset="0"/>
-              </a:rPr>
-              <a:t>Introducción</a:t>
-            </a:r>
-            <a:endParaRPr lang="es-MX" sz="4200" b="1" dirty="0">
-              <a:solidFill>
-                <a:schemeClr val="accent1">
-                  <a:lumMod val="50000"/>
-                </a:schemeClr>
-              </a:solidFill>
-              <a:latin typeface="Arial" panose="020B0604020202020204" pitchFamily="34" charset="0"/>
-              <a:cs typeface="Arial" panose="020B0604020202020204" pitchFamily="34" charset="0"/>
-            </a:endParaRPr>
-          </a:p>
-        </p:txBody>
-      </p:sp>
-      <p:sp>
-        <p:nvSpPr>
-          <p:cNvPr id="26" name="Rectángulo 25">
+            <a:pPr algn="ctr"/>
+            <a:r>
+              <a:rPr lang="es-419" sz="3200" dirty="0"/>
+              <a:t>COLOCAR IMÁGENES</a:t>
+            </a:r>
+          </a:p>
+          <a:p>
+            <a:pPr algn="ctr"/>
+            <a:r>
+              <a:rPr lang="es-419" sz="3200" dirty="0"/>
+              <a:t>O GRÁFICOS</a:t>
+            </a:r>
+          </a:p>
+        </p:txBody>
+      </p:sp>
+      <p:sp>
+        <p:nvSpPr>
+          <p:cNvPr id="15" name="Rectángulo 14">
             <a:extLst>
               <a:ext uri="{FF2B5EF4-FFF2-40B4-BE49-F238E27FC236}">
-                <a16:creationId xmlns:a16="http://schemas.microsoft.com/office/drawing/2014/main" id="{A8971434-26CF-8EF8-5258-1D772F232918}"/>
+                <a16:creationId xmlns:a16="http://schemas.microsoft.com/office/drawing/2014/main" id="{2399A0D7-5110-A242-6052-55F5A5A4241B}"/>
               </a:ext>
             </a:extLst>
           </p:cNvPr>
@@ -3316,13 +3203,15 @@
         </p:nvSpPr>
         <p:spPr>
           <a:xfrm>
-            <a:off x="939623" y="22941417"/>
-            <a:ext cx="13517304" cy="1251856"/>
+            <a:off x="2260738" y="33621970"/>
+            <a:ext cx="5982833" cy="3349337"/>
           </a:xfrm>
           <a:prstGeom prst="rect">
             <a:avLst/>
           </a:prstGeom>
-          <a:noFill/>
+          <a:solidFill>
+            <a:srgbClr val="B8163B"/>
+          </a:solidFill>
           <a:ln>
             <a:noFill/>
           </a:ln>
@@ -3347,24 +3236,58 @@
           <a:bodyPr rtlCol="0" anchor="ctr"/>
           <a:lstStyle/>
           <a:p>
-            <a:r>
-              <a:rPr lang="es-ES" sz="4200" b="1" dirty="0">
-                <a:solidFill>
-                  <a:schemeClr val="accent1">
-                    <a:lumMod val="50000"/>
-                  </a:schemeClr>
-                </a:solidFill>
+            <a:pPr algn="ctr"/>
+            <a:r>
+              <a:rPr lang="es-419" sz="3200" dirty="0"/>
+              <a:t>COLOCAR IMÁGENES</a:t>
+            </a:r>
+          </a:p>
+          <a:p>
+            <a:pPr algn="ctr"/>
+            <a:r>
+              <a:rPr lang="es-419" sz="3200" dirty="0"/>
+              <a:t>O GRÁFICOS</a:t>
+            </a:r>
+          </a:p>
+        </p:txBody>
+      </p:sp>
+      <p:sp>
+        <p:nvSpPr>
+          <p:cNvPr id="17" name="CuadroTexto 16">
+            <a:extLst>
+              <a:ext uri="{FF2B5EF4-FFF2-40B4-BE49-F238E27FC236}">
+                <a16:creationId xmlns:a16="http://schemas.microsoft.com/office/drawing/2014/main" id="{08CE8D94-316E-C7A4-A109-176CC9CE193F}"/>
+              </a:ext>
+            </a:extLst>
+          </p:cNvPr>
+          <p:cNvSpPr txBox="1"/>
+          <p:nvPr/>
+        </p:nvSpPr>
+        <p:spPr>
+          <a:xfrm>
+            <a:off x="17027432" y="30772641"/>
+            <a:ext cx="13602167" cy="1569660"/>
+          </a:xfrm>
+          <a:prstGeom prst="rect">
+            <a:avLst/>
+          </a:prstGeom>
+          <a:noFill/>
+        </p:spPr>
+        <p:txBody>
+          <a:bodyPr wrap="square" rtlCol="0">
+            <a:spAutoFit/>
+          </a:bodyPr>
+          <a:lstStyle/>
+          <a:p>
+            <a:pPr algn="just"/>
+            <a:r>
+              <a:rPr lang="es-ES" sz="3200" dirty="0">
                 <a:latin typeface="Arial" panose="020B0604020202020204" pitchFamily="34" charset="0"/>
                 <a:cs typeface="Arial" panose="020B0604020202020204" pitchFamily="34" charset="0"/>
               </a:rPr>
-              <a:t>Materiales y Métodos</a:t>
-            </a:r>
-            <a:endParaRPr lang="es-MX" sz="4501" b="1" dirty="0">
-              <a:solidFill>
-                <a:schemeClr val="accent1">
-                  <a:lumMod val="50000"/>
-                </a:schemeClr>
-              </a:solidFill>
+              <a:t>Arial 32, justificado. En esta sección el autor puede agregar observaciones, reflexiones, recomendaciones, sugerencias adicionales y conclusiones relacionadas con el tema tratado en el estudio.</a:t>
+            </a:r>
+            <a:endParaRPr lang="es-MX" sz="3200" dirty="0">
               <a:latin typeface="Arial" panose="020B0604020202020204" pitchFamily="34" charset="0"/>
               <a:cs typeface="Arial" panose="020B0604020202020204" pitchFamily="34" charset="0"/>
             </a:endParaRPr>
@@ -3373,10 +3296,10 @@
       </p:sp>
       <p:sp>
         <p:nvSpPr>
-          <p:cNvPr id="33" name="Rectángulo 32">
+          <p:cNvPr id="18" name="Rectángulo 17">
             <a:extLst>
               <a:ext uri="{FF2B5EF4-FFF2-40B4-BE49-F238E27FC236}">
-                <a16:creationId xmlns:a16="http://schemas.microsoft.com/office/drawing/2014/main" id="{E1AB0973-3E28-07AE-78CF-349116883C57}"/>
+                <a16:creationId xmlns:a16="http://schemas.microsoft.com/office/drawing/2014/main" id="{2B0461DB-3EB2-7C1F-4FF3-0C323AB15329}"/>
               </a:ext>
             </a:extLst>
           </p:cNvPr>
@@ -3385,13 +3308,268 @@
         </p:nvSpPr>
         <p:spPr>
           <a:xfrm>
-            <a:off x="12555787" y="32719151"/>
-            <a:ext cx="4058104" cy="1251856"/>
+            <a:off x="2658162" y="5573776"/>
+            <a:ext cx="27082963" cy="2172359"/>
+          </a:xfrm>
+          <a:prstGeom prst="rect">
+            <a:avLst/>
+          </a:prstGeom>
+          <a:ln>
+            <a:noFill/>
+          </a:ln>
+        </p:spPr>
+        <p:txBody>
+          <a:bodyPr wrap="square" lIns="322549" tIns="161275" rIns="322549" bIns="161275">
+            <a:spAutoFit/>
+          </a:bodyPr>
+          <a:lstStyle/>
+          <a:p>
+            <a:pPr algn="ctr"/>
+            <a:r>
+              <a:rPr lang="es-MX" sz="6000" b="1" dirty="0">
+                <a:effectLst>
+                  <a:outerShdw blurRad="38100" dist="38100" dir="2700000" algn="tl">
+                    <a:srgbClr val="000000">
+                      <a:alpha val="43137"/>
+                    </a:srgbClr>
+                  </a:outerShdw>
+                </a:effectLst>
+                <a:latin typeface="Arial" panose="020B0604020202020204" pitchFamily="34" charset="0"/>
+                <a:cs typeface="Arial" panose="020B0604020202020204" pitchFamily="34" charset="0"/>
+              </a:rPr>
+              <a:t>Título del trabajo (Arial negrita, tamaño 60, alineación centrada, primera letra mayúscula, resto minúscula, máximo 12 palabras)</a:t>
+            </a:r>
+          </a:p>
+        </p:txBody>
+      </p:sp>
+      <p:sp>
+        <p:nvSpPr>
+          <p:cNvPr id="19" name="CuadroTexto 18">
+            <a:extLst>
+              <a:ext uri="{FF2B5EF4-FFF2-40B4-BE49-F238E27FC236}">
+                <a16:creationId xmlns:a16="http://schemas.microsoft.com/office/drawing/2014/main" id="{488EE9A4-9968-994E-9E80-2A36128A4005}"/>
+              </a:ext>
+            </a:extLst>
+          </p:cNvPr>
+          <p:cNvSpPr txBox="1"/>
+          <p:nvPr/>
+        </p:nvSpPr>
+        <p:spPr>
+          <a:xfrm>
+            <a:off x="2754403" y="7580347"/>
+            <a:ext cx="26890480" cy="1938992"/>
           </a:xfrm>
           <a:prstGeom prst="rect">
             <a:avLst/>
           </a:prstGeom>
           <a:noFill/>
+        </p:spPr>
+        <p:txBody>
+          <a:bodyPr wrap="square" rtlCol="0">
+            <a:spAutoFit/>
+          </a:bodyPr>
+          <a:lstStyle/>
+          <a:p>
+            <a:pPr algn="ctr">
+              <a:tabLst>
+                <a:tab pos="2493664" algn="ctr"/>
+                <a:tab pos="4987327" algn="r"/>
+              </a:tabLst>
+            </a:pPr>
+            <a:r>
+              <a:rPr lang="es-ES" sz="4000" b="1" dirty="0">
+                <a:latin typeface="Arial" panose="020B0604020202020204" pitchFamily="34" charset="0"/>
+                <a:ea typeface="Times New Roman" panose="02020603050405020304" pitchFamily="18" charset="0"/>
+                <a:cs typeface="Arial" panose="020B0604020202020204" pitchFamily="34" charset="0"/>
+              </a:rPr>
+              <a:t>Apellido paterno, AM. N</a:t>
+            </a:r>
+            <a:r>
+              <a:rPr lang="es-ES" sz="4000" baseline="30000" dirty="0">
+                <a:latin typeface="Arial" panose="020B0604020202020204" pitchFamily="34" charset="0"/>
+                <a:ea typeface="Times New Roman" panose="02020603050405020304" pitchFamily="18" charset="0"/>
+                <a:cs typeface="Arial" panose="020B0604020202020204" pitchFamily="34" charset="0"/>
+              </a:rPr>
+              <a:t>1</a:t>
+            </a:r>
+            <a:r>
+              <a:rPr lang="es-ES" sz="4000" dirty="0">
+                <a:latin typeface="Arial" panose="020B0604020202020204" pitchFamily="34" charset="0"/>
+                <a:ea typeface="Times New Roman" panose="02020603050405020304" pitchFamily="18" charset="0"/>
+                <a:cs typeface="Arial" panose="020B0604020202020204" pitchFamily="34" charset="0"/>
+              </a:rPr>
+              <a:t>., </a:t>
+            </a:r>
+            <a:r>
+              <a:rPr lang="es-ES" sz="4000" b="1" dirty="0">
+                <a:latin typeface="Arial" panose="020B0604020202020204" pitchFamily="34" charset="0"/>
+                <a:ea typeface="Times New Roman" panose="02020603050405020304" pitchFamily="18" charset="0"/>
+                <a:cs typeface="Arial" panose="020B0604020202020204" pitchFamily="34" charset="0"/>
+              </a:rPr>
+              <a:t>Apellido paterno, AM. N</a:t>
+            </a:r>
+            <a:r>
+              <a:rPr lang="es-ES" sz="4000" baseline="30000" dirty="0">
+                <a:latin typeface="Arial" panose="020B0604020202020204" pitchFamily="34" charset="0"/>
+                <a:ea typeface="Times New Roman" panose="02020603050405020304" pitchFamily="18" charset="0"/>
+                <a:cs typeface="Arial" panose="020B0604020202020204" pitchFamily="34" charset="0"/>
+              </a:rPr>
+              <a:t>1</a:t>
+            </a:r>
+            <a:r>
+              <a:rPr lang="es-ES" sz="4000" dirty="0">
+                <a:latin typeface="Arial" panose="020B0604020202020204" pitchFamily="34" charset="0"/>
+                <a:ea typeface="Times New Roman" panose="02020603050405020304" pitchFamily="18" charset="0"/>
+                <a:cs typeface="Arial" panose="020B0604020202020204" pitchFamily="34" charset="0"/>
+              </a:rPr>
+              <a:t>., </a:t>
+            </a:r>
+            <a:r>
+              <a:rPr lang="es-ES" sz="4000" b="1" dirty="0">
+                <a:latin typeface="Arial" panose="020B0604020202020204" pitchFamily="34" charset="0"/>
+                <a:ea typeface="Times New Roman" panose="02020603050405020304" pitchFamily="18" charset="0"/>
+                <a:cs typeface="Arial" panose="020B0604020202020204" pitchFamily="34" charset="0"/>
+              </a:rPr>
+              <a:t>Apellido paterno, AM. N</a:t>
+            </a:r>
+            <a:r>
+              <a:rPr lang="es-ES" sz="4000" baseline="30000" dirty="0">
+                <a:latin typeface="Arial" panose="020B0604020202020204" pitchFamily="34" charset="0"/>
+                <a:ea typeface="Times New Roman" panose="02020603050405020304" pitchFamily="18" charset="0"/>
+                <a:cs typeface="Arial" panose="020B0604020202020204" pitchFamily="34" charset="0"/>
+              </a:rPr>
+              <a:t>1</a:t>
+            </a:r>
+            <a:r>
+              <a:rPr lang="es-ES" sz="4000" dirty="0">
+                <a:latin typeface="Arial" panose="020B0604020202020204" pitchFamily="34" charset="0"/>
+                <a:ea typeface="Times New Roman" panose="02020603050405020304" pitchFamily="18" charset="0"/>
+                <a:cs typeface="Arial" panose="020B0604020202020204" pitchFamily="34" charset="0"/>
+              </a:rPr>
+              <a:t>* (Arial 40, centrado)  </a:t>
+            </a:r>
+          </a:p>
+          <a:p>
+            <a:pPr algn="ctr">
+              <a:tabLst>
+                <a:tab pos="2493664" algn="ctr"/>
+                <a:tab pos="4987327" algn="r"/>
+              </a:tabLst>
+            </a:pPr>
+            <a:r>
+              <a:rPr lang="es-ES" sz="4000" baseline="30000" dirty="0">
+                <a:latin typeface="Arial" panose="020B0604020202020204" pitchFamily="34" charset="0"/>
+                <a:ea typeface="Times New Roman" panose="02020603050405020304" pitchFamily="18" charset="0"/>
+                <a:cs typeface="Arial" panose="020B0604020202020204" pitchFamily="34" charset="0"/>
+              </a:rPr>
+              <a:t>1</a:t>
+            </a:r>
+            <a:r>
+              <a:rPr lang="es-ES" sz="4000" dirty="0">
+                <a:latin typeface="Arial" panose="020B0604020202020204" pitchFamily="34" charset="0"/>
+                <a:ea typeface="Times New Roman" panose="02020603050405020304" pitchFamily="18" charset="0"/>
+                <a:cs typeface="Arial" panose="020B0604020202020204" pitchFamily="34" charset="0"/>
+              </a:rPr>
+              <a:t>Filiación institucional sin abreviaturas. Ciudad - País. (Arial 40, centrado)</a:t>
+            </a:r>
+          </a:p>
+          <a:p>
+            <a:pPr algn="ctr">
+              <a:tabLst>
+                <a:tab pos="2493664" algn="ctr"/>
+                <a:tab pos="4987327" algn="r"/>
+              </a:tabLst>
+            </a:pPr>
+            <a:r>
+              <a:rPr lang="es-ES" sz="4000" dirty="0">
+                <a:latin typeface="Arial" panose="020B0604020202020204" pitchFamily="34" charset="0"/>
+                <a:ea typeface="Times New Roman" panose="02020603050405020304" pitchFamily="18" charset="0"/>
+                <a:cs typeface="Arial" panose="020B0604020202020204" pitchFamily="34" charset="0"/>
+              </a:rPr>
+              <a:t>* Autor de correspondencia: </a:t>
+            </a:r>
+            <a:r>
+              <a:rPr lang="es-ES" sz="4000" dirty="0">
+                <a:latin typeface="Arial" panose="020B0604020202020204" pitchFamily="34" charset="0"/>
+                <a:ea typeface="Times New Roman" panose="02020603050405020304" pitchFamily="18" charset="0"/>
+                <a:cs typeface="Arial" panose="020B0604020202020204" pitchFamily="34" charset="0"/>
+                <a:hlinkClick r:id="rId3"/>
+              </a:rPr>
+              <a:t>ejemplo@outlook.com</a:t>
+            </a:r>
+            <a:r>
+              <a:rPr lang="es-ES" sz="4000" dirty="0">
+                <a:latin typeface="Arial" panose="020B0604020202020204" pitchFamily="34" charset="0"/>
+                <a:ea typeface="Times New Roman" panose="02020603050405020304" pitchFamily="18" charset="0"/>
+                <a:cs typeface="Arial" panose="020B0604020202020204" pitchFamily="34" charset="0"/>
+              </a:rPr>
+              <a:t> (Arial 40, centrado)</a:t>
+            </a:r>
+          </a:p>
+        </p:txBody>
+      </p:sp>
+      <p:sp>
+        <p:nvSpPr>
+          <p:cNvPr id="24" name="CuadroTexto 23">
+            <a:extLst>
+              <a:ext uri="{FF2B5EF4-FFF2-40B4-BE49-F238E27FC236}">
+                <a16:creationId xmlns:a16="http://schemas.microsoft.com/office/drawing/2014/main" id="{374744B8-C271-0478-06AA-D01D606EF7BA}"/>
+              </a:ext>
+            </a:extLst>
+          </p:cNvPr>
+          <p:cNvSpPr txBox="1"/>
+          <p:nvPr/>
+        </p:nvSpPr>
+        <p:spPr>
+          <a:xfrm>
+            <a:off x="1769689" y="25428964"/>
+            <a:ext cx="13742639" cy="3046988"/>
+          </a:xfrm>
+          <a:prstGeom prst="rect">
+            <a:avLst/>
+          </a:prstGeom>
+          <a:noFill/>
+        </p:spPr>
+        <p:txBody>
+          <a:bodyPr wrap="square">
+            <a:spAutoFit/>
+          </a:bodyPr>
+          <a:lstStyle/>
+          <a:p>
+            <a:pPr algn="just"/>
+            <a:r>
+              <a:rPr lang="es-ES" sz="3200" dirty="0">
+                <a:latin typeface="Arial" panose="020B0604020202020204" pitchFamily="34" charset="0"/>
+                <a:cs typeface="Arial" panose="020B0604020202020204" pitchFamily="34" charset="0"/>
+              </a:rPr>
+              <a:t>Arial 32, justificado. Describir la metodología de forma clara y las técnicas aplicadas. Citar con números entre corchetes los métodos ya publicados y si fueron modificados, indicando la modificación. Se pueden incluir tablas y figuras, así como las ecuaciones si el autor lo considera oportuno. Las tablas y figuras irán numeradas en orden de aparición, como título las tablas y pie de figuras en las figuras.</a:t>
+            </a:r>
+          </a:p>
+        </p:txBody>
+      </p:sp>
+      <p:sp>
+        <p:nvSpPr>
+          <p:cNvPr id="25" name="Rectángulo 24">
+            <a:extLst>
+              <a:ext uri="{FF2B5EF4-FFF2-40B4-BE49-F238E27FC236}">
+                <a16:creationId xmlns:a16="http://schemas.microsoft.com/office/drawing/2014/main" id="{792FC166-D880-D29E-ECAB-4B5DD73B0029}"/>
+              </a:ext>
+            </a:extLst>
+          </p:cNvPr>
+          <p:cNvSpPr/>
+          <p:nvPr/>
+        </p:nvSpPr>
+        <p:spPr>
+          <a:xfrm>
+            <a:off x="8921188" y="33664138"/>
+            <a:ext cx="5982833" cy="3349337"/>
+          </a:xfrm>
+          <a:prstGeom prst="rect">
+            <a:avLst/>
+          </a:prstGeom>
+          <a:solidFill>
+            <a:srgbClr val="B8163B"/>
+          </a:solidFill>
           <a:ln>
             <a:noFill/>
           </a:ln>
@@ -3418,35 +3596,25 @@
           <a:p>
             <a:pPr algn="ctr"/>
             <a:r>
-              <a:rPr lang="es-ES" sz="4200" b="1" dirty="0">
-                <a:solidFill>
-                  <a:schemeClr val="accent1">
-                    <a:lumMod val="50000"/>
-                  </a:schemeClr>
-                </a:solidFill>
-                <a:latin typeface="Arial" panose="020B0604020202020204" pitchFamily="34" charset="0"/>
-                <a:cs typeface="Arial" panose="020B0604020202020204" pitchFamily="34" charset="0"/>
-              </a:rPr>
-              <a:t>Referencias </a:t>
-            </a:r>
-            <a:endParaRPr lang="es-MX" sz="4200" b="1" dirty="0">
-              <a:solidFill>
-                <a:schemeClr val="accent1">
-                  <a:lumMod val="50000"/>
-                </a:schemeClr>
-              </a:solidFill>
-              <a:latin typeface="Arial" panose="020B0604020202020204" pitchFamily="34" charset="0"/>
-              <a:cs typeface="Arial" panose="020B0604020202020204" pitchFamily="34" charset="0"/>
-            </a:endParaRPr>
-          </a:p>
-        </p:txBody>
-      </p:sp>
-      <p:sp>
-        <p:nvSpPr>
-          <p:cNvPr id="37" name="CuadroTexto 36">
+              <a:rPr lang="es-419" sz="3200" dirty="0"/>
+              <a:t>COLOCAR IMÁGENES</a:t>
+            </a:r>
+          </a:p>
+          <a:p>
+            <a:pPr algn="ctr"/>
+            <a:r>
+              <a:rPr lang="es-419" sz="3200" dirty="0"/>
+              <a:t>O GRÁFICOS</a:t>
+            </a:r>
+          </a:p>
+        </p:txBody>
+      </p:sp>
+      <p:sp>
+        <p:nvSpPr>
+          <p:cNvPr id="27" name="CuadroTexto 26">
             <a:extLst>
               <a:ext uri="{FF2B5EF4-FFF2-40B4-BE49-F238E27FC236}">
-                <a16:creationId xmlns:a16="http://schemas.microsoft.com/office/drawing/2014/main" id="{9F27DB89-18F1-E776-D92A-772DDE541FD3}"/>
+                <a16:creationId xmlns:a16="http://schemas.microsoft.com/office/drawing/2014/main" id="{C3296E2B-E17D-D3A8-1939-626B014684D7}"/>
               </a:ext>
             </a:extLst>
           </p:cNvPr>
@@ -3455,8 +3623,8 @@
         </p:nvSpPr>
         <p:spPr>
           <a:xfrm>
-            <a:off x="1006749" y="33887931"/>
-            <a:ext cx="22256663" cy="2677656"/>
+            <a:off x="22962373" y="20937221"/>
+            <a:ext cx="7461486" cy="3539430"/>
           </a:xfrm>
           <a:prstGeom prst="rect">
             <a:avLst/>
@@ -3464,347 +3632,32 @@
           <a:noFill/>
         </p:spPr>
         <p:txBody>
-          <a:bodyPr wrap="square" rtlCol="0">
+          <a:bodyPr wrap="square">
             <a:spAutoFit/>
           </a:bodyPr>
           <a:lstStyle/>
           <a:p>
             <a:pPr algn="just"/>
             <a:r>
-              <a:rPr lang="es-MX" sz="2400" dirty="0">
+              <a:rPr lang="es-ES" sz="3200" dirty="0">
                 <a:latin typeface="Arial" panose="020B0604020202020204" pitchFamily="34" charset="0"/>
                 <a:cs typeface="Arial" panose="020B0604020202020204" pitchFamily="34" charset="0"/>
               </a:rPr>
-              <a:t>Arial 24, justificado. Formato APA. Referencias mas relevantes del trabajo En referencias de más de tres autores colocar </a:t>
-            </a:r>
-            <a:r>
-              <a:rPr lang="es-MX" sz="2400" i="1" dirty="0">
-                <a:latin typeface="Arial" panose="020B0604020202020204" pitchFamily="34" charset="0"/>
-                <a:cs typeface="Arial" panose="020B0604020202020204" pitchFamily="34" charset="0"/>
-              </a:rPr>
-              <a:t>et al.</a:t>
-            </a:r>
-          </a:p>
-          <a:p>
-            <a:pPr algn="just"/>
-            <a:endParaRPr lang="es-MX" sz="2400" i="1" dirty="0">
+              <a:t>Arial 32, justificado. Esta sección puede ser expresada en texto o incluir tablas y figuras. Las tablas y figuras deberán ser numeradas en orden de aparición. Se incluye la discusión de los resultados mencionados, También cite con número entre corchetes.</a:t>
+            </a:r>
+            <a:endParaRPr lang="es-MX" sz="3200" dirty="0">
               <a:latin typeface="Arial" panose="020B0604020202020204" pitchFamily="34" charset="0"/>
               <a:cs typeface="Arial" panose="020B0604020202020204" pitchFamily="34" charset="0"/>
             </a:endParaRPr>
           </a:p>
-          <a:p>
-            <a:pPr algn="just"/>
-            <a:r>
-              <a:rPr lang="es-MX" sz="2400" dirty="0">
-                <a:latin typeface="Arial" panose="020B0604020202020204" pitchFamily="34" charset="0"/>
-                <a:ea typeface="Calibri" panose="020F0502020204030204" pitchFamily="34" charset="0"/>
-                <a:cs typeface="Arial" panose="020B0604020202020204" pitchFamily="34" charset="0"/>
-              </a:rPr>
-              <a:t>[1]	</a:t>
-            </a:r>
-            <a:r>
-              <a:rPr lang="es-MX" sz="2400" dirty="0" err="1">
-                <a:latin typeface="Arial" panose="020B0604020202020204" pitchFamily="34" charset="0"/>
-                <a:ea typeface="Calibri" panose="020F0502020204030204" pitchFamily="34" charset="0"/>
-                <a:cs typeface="Arial" panose="020B0604020202020204" pitchFamily="34" charset="0"/>
-              </a:rPr>
-              <a:t>Beebe</a:t>
-            </a:r>
-            <a:r>
-              <a:rPr lang="es-MX" sz="2400" dirty="0">
-                <a:latin typeface="Arial" panose="020B0604020202020204" pitchFamily="34" charset="0"/>
-                <a:ea typeface="Calibri" panose="020F0502020204030204" pitchFamily="34" charset="0"/>
-                <a:cs typeface="Arial" panose="020B0604020202020204" pitchFamily="34" charset="0"/>
-              </a:rPr>
-              <a:t>, D. J. (1993). “</a:t>
-            </a:r>
-            <a:r>
-              <a:rPr lang="es-MX" sz="2400" dirty="0" err="1">
-                <a:latin typeface="Arial" panose="020B0604020202020204" pitchFamily="34" charset="0"/>
-                <a:ea typeface="Calibri" panose="020F0502020204030204" pitchFamily="34" charset="0"/>
-                <a:cs typeface="Arial" panose="020B0604020202020204" pitchFamily="34" charset="0"/>
-              </a:rPr>
-              <a:t>Signal</a:t>
-            </a:r>
-            <a:r>
-              <a:rPr lang="es-MX" sz="2400" dirty="0">
-                <a:latin typeface="Arial" panose="020B0604020202020204" pitchFamily="34" charset="0"/>
-                <a:ea typeface="Calibri" panose="020F0502020204030204" pitchFamily="34" charset="0"/>
-                <a:cs typeface="Arial" panose="020B0604020202020204" pitchFamily="34" charset="0"/>
-              </a:rPr>
-              <a:t> </a:t>
-            </a:r>
-            <a:r>
-              <a:rPr lang="es-MX" sz="2400" dirty="0" err="1">
-                <a:latin typeface="Arial" panose="020B0604020202020204" pitchFamily="34" charset="0"/>
-                <a:ea typeface="Calibri" panose="020F0502020204030204" pitchFamily="34" charset="0"/>
-                <a:cs typeface="Arial" panose="020B0604020202020204" pitchFamily="34" charset="0"/>
-              </a:rPr>
-              <a:t>conversion</a:t>
-            </a:r>
-            <a:r>
-              <a:rPr lang="es-MX" sz="2400" dirty="0">
-                <a:latin typeface="Arial" panose="020B0604020202020204" pitchFamily="34" charset="0"/>
-                <a:ea typeface="Calibri" panose="020F0502020204030204" pitchFamily="34" charset="0"/>
-                <a:cs typeface="Arial" panose="020B0604020202020204" pitchFamily="34" charset="0"/>
-              </a:rPr>
-              <a:t>” in </a:t>
-            </a:r>
-            <a:r>
-              <a:rPr lang="es-MX" sz="2400" i="1" dirty="0" err="1">
-                <a:latin typeface="Arial" panose="020B0604020202020204" pitchFamily="34" charset="0"/>
-                <a:ea typeface="Calibri" panose="020F0502020204030204" pitchFamily="34" charset="0"/>
-                <a:cs typeface="Arial" panose="020B0604020202020204" pitchFamily="34" charset="0"/>
-              </a:rPr>
-              <a:t>Biomedical</a:t>
-            </a:r>
-            <a:r>
-              <a:rPr lang="es-MX" sz="2400" i="1" dirty="0">
-                <a:latin typeface="Arial" panose="020B0604020202020204" pitchFamily="34" charset="0"/>
-                <a:ea typeface="Calibri" panose="020F0502020204030204" pitchFamily="34" charset="0"/>
-                <a:cs typeface="Arial" panose="020B0604020202020204" pitchFamily="34" charset="0"/>
-              </a:rPr>
-              <a:t> Digital </a:t>
-            </a:r>
-            <a:r>
-              <a:rPr lang="es-MX" sz="2400" i="1" dirty="0" err="1">
-                <a:latin typeface="Arial" panose="020B0604020202020204" pitchFamily="34" charset="0"/>
-                <a:ea typeface="Calibri" panose="020F0502020204030204" pitchFamily="34" charset="0"/>
-                <a:cs typeface="Arial" panose="020B0604020202020204" pitchFamily="34" charset="0"/>
-              </a:rPr>
-              <a:t>Signal</a:t>
-            </a:r>
-            <a:r>
-              <a:rPr lang="es-MX" sz="2400" i="1" dirty="0">
-                <a:latin typeface="Arial" panose="020B0604020202020204" pitchFamily="34" charset="0"/>
-                <a:ea typeface="Calibri" panose="020F0502020204030204" pitchFamily="34" charset="0"/>
-                <a:cs typeface="Arial" panose="020B0604020202020204" pitchFamily="34" charset="0"/>
-              </a:rPr>
-              <a:t> Processing</a:t>
-            </a:r>
-            <a:r>
-              <a:rPr lang="es-MX" sz="2400" dirty="0">
-                <a:latin typeface="Arial" panose="020B0604020202020204" pitchFamily="34" charset="0"/>
-                <a:ea typeface="Calibri" panose="020F0502020204030204" pitchFamily="34" charset="0"/>
-                <a:cs typeface="Arial" panose="020B0604020202020204" pitchFamily="34" charset="0"/>
-              </a:rPr>
-              <a:t>, W. J. </a:t>
-            </a:r>
-            <a:r>
-              <a:rPr lang="es-MX" sz="2400" dirty="0" err="1">
-                <a:latin typeface="Arial" panose="020B0604020202020204" pitchFamily="34" charset="0"/>
-                <a:ea typeface="Calibri" panose="020F0502020204030204" pitchFamily="34" charset="0"/>
-                <a:cs typeface="Arial" panose="020B0604020202020204" pitchFamily="34" charset="0"/>
-              </a:rPr>
-              <a:t>Tompkins</a:t>
-            </a:r>
-            <a:r>
-              <a:rPr lang="es-MX" sz="2400" dirty="0">
-                <a:latin typeface="Arial" panose="020B0604020202020204" pitchFamily="34" charset="0"/>
-                <a:ea typeface="Calibri" panose="020F0502020204030204" pitchFamily="34" charset="0"/>
-                <a:cs typeface="Arial" panose="020B0604020202020204" pitchFamily="34" charset="0"/>
-              </a:rPr>
-              <a:t>, Ed. Englewood </a:t>
-            </a:r>
-            <a:r>
-              <a:rPr lang="es-MX" sz="2400" dirty="0" err="1">
-                <a:latin typeface="Arial" panose="020B0604020202020204" pitchFamily="34" charset="0"/>
-                <a:ea typeface="Calibri" panose="020F0502020204030204" pitchFamily="34" charset="0"/>
-                <a:cs typeface="Arial" panose="020B0604020202020204" pitchFamily="34" charset="0"/>
-              </a:rPr>
-              <a:t>Cliffs</a:t>
-            </a:r>
-            <a:r>
-              <a:rPr lang="es-MX" sz="2400" dirty="0">
-                <a:latin typeface="Arial" panose="020B0604020202020204" pitchFamily="34" charset="0"/>
-                <a:ea typeface="Calibri" panose="020F0502020204030204" pitchFamily="34" charset="0"/>
-                <a:cs typeface="Arial" panose="020B0604020202020204" pitchFamily="34" charset="0"/>
-              </a:rPr>
-              <a:t>, NJ: Prentice-Hall, 1993, ch. 3, pp. 61–74.</a:t>
-            </a:r>
-          </a:p>
-          <a:p>
-            <a:pPr algn="just"/>
-            <a:r>
-              <a:rPr lang="es-MX" sz="2400" dirty="0">
-                <a:latin typeface="Arial" panose="020B0604020202020204" pitchFamily="34" charset="0"/>
-                <a:ea typeface="Calibri" panose="020F0502020204030204" pitchFamily="34" charset="0"/>
-                <a:cs typeface="Arial" panose="020B0604020202020204" pitchFamily="34" charset="0"/>
-              </a:rPr>
-              <a:t>[2]	</a:t>
-            </a:r>
-            <a:r>
-              <a:rPr lang="es-MX" sz="2400" dirty="0" err="1">
-                <a:latin typeface="Arial" panose="020B0604020202020204" pitchFamily="34" charset="0"/>
-                <a:ea typeface="Calibri" panose="020F0502020204030204" pitchFamily="34" charset="0"/>
-                <a:cs typeface="Arial" panose="020B0604020202020204" pitchFamily="34" charset="0"/>
-              </a:rPr>
-              <a:t>Akay</a:t>
-            </a:r>
-            <a:r>
-              <a:rPr lang="es-MX" sz="2400" dirty="0">
-                <a:latin typeface="Arial" panose="020B0604020202020204" pitchFamily="34" charset="0"/>
-                <a:ea typeface="Calibri" panose="020F0502020204030204" pitchFamily="34" charset="0"/>
-                <a:cs typeface="Arial" panose="020B0604020202020204" pitchFamily="34" charset="0"/>
-              </a:rPr>
-              <a:t>, M. (1998). </a:t>
-            </a:r>
-            <a:r>
-              <a:rPr lang="es-MX" sz="2400" i="1" dirty="0">
-                <a:latin typeface="Arial" panose="020B0604020202020204" pitchFamily="34" charset="0"/>
-                <a:ea typeface="Calibri" panose="020F0502020204030204" pitchFamily="34" charset="0"/>
-                <a:cs typeface="Arial" panose="020B0604020202020204" pitchFamily="34" charset="0"/>
-              </a:rPr>
-              <a:t>Time </a:t>
-            </a:r>
-            <a:r>
-              <a:rPr lang="es-MX" sz="2400" i="1" dirty="0" err="1">
-                <a:latin typeface="Arial" panose="020B0604020202020204" pitchFamily="34" charset="0"/>
-                <a:ea typeface="Calibri" panose="020F0502020204030204" pitchFamily="34" charset="0"/>
-                <a:cs typeface="Arial" panose="020B0604020202020204" pitchFamily="34" charset="0"/>
-              </a:rPr>
-              <a:t>Frequency</a:t>
-            </a:r>
-            <a:r>
-              <a:rPr lang="es-MX" sz="2400" i="1" dirty="0">
-                <a:latin typeface="Arial" panose="020B0604020202020204" pitchFamily="34" charset="0"/>
-                <a:ea typeface="Calibri" panose="020F0502020204030204" pitchFamily="34" charset="0"/>
-                <a:cs typeface="Arial" panose="020B0604020202020204" pitchFamily="34" charset="0"/>
-              </a:rPr>
-              <a:t> and Wavelets in </a:t>
-            </a:r>
-            <a:r>
-              <a:rPr lang="es-MX" sz="2400" i="1" dirty="0" err="1">
-                <a:latin typeface="Arial" panose="020B0604020202020204" pitchFamily="34" charset="0"/>
-                <a:ea typeface="Calibri" panose="020F0502020204030204" pitchFamily="34" charset="0"/>
-                <a:cs typeface="Arial" panose="020B0604020202020204" pitchFamily="34" charset="0"/>
-              </a:rPr>
-              <a:t>Biomedical</a:t>
-            </a:r>
-            <a:r>
-              <a:rPr lang="es-MX" sz="2400" i="1" dirty="0">
-                <a:latin typeface="Arial" panose="020B0604020202020204" pitchFamily="34" charset="0"/>
-                <a:ea typeface="Calibri" panose="020F0502020204030204" pitchFamily="34" charset="0"/>
-                <a:cs typeface="Arial" panose="020B0604020202020204" pitchFamily="34" charset="0"/>
-              </a:rPr>
-              <a:t> </a:t>
-            </a:r>
-            <a:r>
-              <a:rPr lang="es-MX" sz="2400" i="1" dirty="0" err="1">
-                <a:latin typeface="Arial" panose="020B0604020202020204" pitchFamily="34" charset="0"/>
-                <a:ea typeface="Calibri" panose="020F0502020204030204" pitchFamily="34" charset="0"/>
-                <a:cs typeface="Arial" panose="020B0604020202020204" pitchFamily="34" charset="0"/>
-              </a:rPr>
-              <a:t>Signal</a:t>
-            </a:r>
-            <a:r>
-              <a:rPr lang="es-MX" sz="2400" i="1" dirty="0">
-                <a:latin typeface="Arial" panose="020B0604020202020204" pitchFamily="34" charset="0"/>
-                <a:ea typeface="Calibri" panose="020F0502020204030204" pitchFamily="34" charset="0"/>
-                <a:cs typeface="Arial" panose="020B0604020202020204" pitchFamily="34" charset="0"/>
-              </a:rPr>
-              <a:t> Processing</a:t>
-            </a:r>
-            <a:r>
-              <a:rPr lang="es-MX" sz="2400" dirty="0">
-                <a:latin typeface="Arial" panose="020B0604020202020204" pitchFamily="34" charset="0"/>
-                <a:ea typeface="Calibri" panose="020F0502020204030204" pitchFamily="34" charset="0"/>
-                <a:cs typeface="Arial" panose="020B0604020202020204" pitchFamily="34" charset="0"/>
-              </a:rPr>
-              <a:t>. Piscataway, NJ: IEEE </a:t>
-            </a:r>
-            <a:r>
-              <a:rPr lang="es-MX" sz="2400" dirty="0" err="1">
-                <a:latin typeface="Arial" panose="020B0604020202020204" pitchFamily="34" charset="0"/>
-                <a:ea typeface="Calibri" panose="020F0502020204030204" pitchFamily="34" charset="0"/>
-                <a:cs typeface="Arial" panose="020B0604020202020204" pitchFamily="34" charset="0"/>
-              </a:rPr>
-              <a:t>Press</a:t>
-            </a:r>
-            <a:r>
-              <a:rPr lang="es-MX" sz="2400" dirty="0">
-                <a:latin typeface="Arial" panose="020B0604020202020204" pitchFamily="34" charset="0"/>
-                <a:ea typeface="Calibri" panose="020F0502020204030204" pitchFamily="34" charset="0"/>
-                <a:cs typeface="Arial" panose="020B0604020202020204" pitchFamily="34" charset="0"/>
-              </a:rPr>
-              <a:t>, pp. 123–135.</a:t>
-            </a:r>
-          </a:p>
-          <a:p>
-            <a:pPr algn="just"/>
-            <a:r>
-              <a:rPr lang="es-MX" sz="2400" dirty="0">
-                <a:latin typeface="Arial" panose="020B0604020202020204" pitchFamily="34" charset="0"/>
-                <a:ea typeface="Calibri" panose="020F0502020204030204" pitchFamily="34" charset="0"/>
-                <a:cs typeface="Arial" panose="020B0604020202020204" pitchFamily="34" charset="0"/>
-              </a:rPr>
-              <a:t>[3]	Gentili G. B., </a:t>
-            </a:r>
-            <a:r>
-              <a:rPr lang="es-MX" sz="2400" dirty="0" err="1">
-                <a:latin typeface="Arial" panose="020B0604020202020204" pitchFamily="34" charset="0"/>
-                <a:ea typeface="Calibri" panose="020F0502020204030204" pitchFamily="34" charset="0"/>
-                <a:cs typeface="Arial" panose="020B0604020202020204" pitchFamily="34" charset="0"/>
-              </a:rPr>
-              <a:t>Tesi</a:t>
-            </a:r>
-            <a:r>
-              <a:rPr lang="es-MX" sz="2400" dirty="0">
-                <a:latin typeface="Arial" panose="020B0604020202020204" pitchFamily="34" charset="0"/>
-                <a:ea typeface="Calibri" panose="020F0502020204030204" pitchFamily="34" charset="0"/>
-                <a:cs typeface="Arial" panose="020B0604020202020204" pitchFamily="34" charset="0"/>
-              </a:rPr>
-              <a:t>, V., </a:t>
-            </a:r>
-            <a:r>
-              <a:rPr lang="es-MX" sz="2400" dirty="0" err="1">
-                <a:latin typeface="Arial" panose="020B0604020202020204" pitchFamily="34" charset="0"/>
-                <a:ea typeface="Calibri" panose="020F0502020204030204" pitchFamily="34" charset="0"/>
-                <a:cs typeface="Arial" panose="020B0604020202020204" pitchFamily="34" charset="0"/>
-              </a:rPr>
-              <a:t>Linari</a:t>
-            </a:r>
-            <a:r>
-              <a:rPr lang="es-MX" sz="2400" dirty="0">
-                <a:latin typeface="Arial" panose="020B0604020202020204" pitchFamily="34" charset="0"/>
-                <a:ea typeface="Calibri" panose="020F0502020204030204" pitchFamily="34" charset="0"/>
-                <a:cs typeface="Arial" panose="020B0604020202020204" pitchFamily="34" charset="0"/>
-              </a:rPr>
-              <a:t>, M., et al. (2022). “A versatile microwave plethysmograph for the monitoring of physiological parameters,” </a:t>
-            </a:r>
-            <a:r>
-              <a:rPr lang="es-MX" sz="2400" i="1" dirty="0">
-                <a:latin typeface="Arial" panose="020B0604020202020204" pitchFamily="34" charset="0"/>
-                <a:ea typeface="Calibri" panose="020F0502020204030204" pitchFamily="34" charset="0"/>
-                <a:cs typeface="Arial" panose="020B0604020202020204" pitchFamily="34" charset="0"/>
-              </a:rPr>
-              <a:t>IEEE Trans. </a:t>
-            </a:r>
-            <a:r>
-              <a:rPr lang="es-MX" sz="2400" i="1" dirty="0" err="1">
-                <a:latin typeface="Arial" panose="020B0604020202020204" pitchFamily="34" charset="0"/>
-                <a:ea typeface="Calibri" panose="020F0502020204030204" pitchFamily="34" charset="0"/>
-                <a:cs typeface="Arial" panose="020B0604020202020204" pitchFamily="34" charset="0"/>
-              </a:rPr>
-              <a:t>Biomed</a:t>
-            </a:r>
-            <a:r>
-              <a:rPr lang="es-MX" sz="2400" dirty="0">
-                <a:latin typeface="Arial" panose="020B0604020202020204" pitchFamily="34" charset="0"/>
-                <a:ea typeface="Calibri" panose="020F0502020204030204" pitchFamily="34" charset="0"/>
-                <a:cs typeface="Arial" panose="020B0604020202020204" pitchFamily="34" charset="0"/>
-              </a:rPr>
-              <a:t>. Eng., vol. 49, no. 10, pp. 1204–1210</a:t>
-            </a:r>
-          </a:p>
-        </p:txBody>
-      </p:sp>
-      <p:sp>
-        <p:nvSpPr>
-          <p:cNvPr id="45" name="Rectángulo 44">
+        </p:txBody>
+      </p:sp>
+      <p:sp>
+        <p:nvSpPr>
+          <p:cNvPr id="28" name="Rectángulo 27">
             <a:extLst>
               <a:ext uri="{FF2B5EF4-FFF2-40B4-BE49-F238E27FC236}">
-                <a16:creationId xmlns:a16="http://schemas.microsoft.com/office/drawing/2014/main" id="{29B5DFF1-FA47-D3D9-4DAD-AB88B1206FC7}"/>
+                <a16:creationId xmlns:a16="http://schemas.microsoft.com/office/drawing/2014/main" id="{F1B6431D-F306-BFF3-ABF1-5254C44D8727}"/>
               </a:ext>
             </a:extLst>
           </p:cNvPr>
@@ -3813,13 +3666,15 @@
         </p:nvSpPr>
         <p:spPr>
           <a:xfrm>
-            <a:off x="15313225" y="10407172"/>
-            <a:ext cx="10754018" cy="1251856"/>
+            <a:off x="17027432" y="15038798"/>
+            <a:ext cx="6333339" cy="3515691"/>
           </a:xfrm>
           <a:prstGeom prst="rect">
             <a:avLst/>
           </a:prstGeom>
-          <a:noFill/>
+          <a:solidFill>
+            <a:srgbClr val="B8163B"/>
+          </a:solidFill>
           <a:ln>
             <a:noFill/>
           </a:ln>
@@ -3844,36 +3699,68 @@
           <a:bodyPr rtlCol="0" anchor="ctr"/>
           <a:lstStyle/>
           <a:p>
-            <a:r>
-              <a:rPr lang="es-ES" sz="4200" b="1" dirty="0">
-                <a:solidFill>
-                  <a:schemeClr val="accent1">
-                    <a:lumMod val="50000"/>
-                  </a:schemeClr>
-                </a:solidFill>
+            <a:pPr algn="ctr"/>
+            <a:r>
+              <a:rPr lang="es-419" sz="3200" dirty="0"/>
+              <a:t>COLOCAR IMÁGENES</a:t>
+            </a:r>
+          </a:p>
+          <a:p>
+            <a:pPr algn="ctr"/>
+            <a:r>
+              <a:rPr lang="es-419" sz="3200" dirty="0"/>
+              <a:t>O GRÁFICOS</a:t>
+            </a:r>
+          </a:p>
+        </p:txBody>
+      </p:sp>
+      <p:sp>
+        <p:nvSpPr>
+          <p:cNvPr id="30" name="CuadroTexto 29">
+            <a:extLst>
+              <a:ext uri="{FF2B5EF4-FFF2-40B4-BE49-F238E27FC236}">
+                <a16:creationId xmlns:a16="http://schemas.microsoft.com/office/drawing/2014/main" id="{0648050A-C6F4-F79D-F611-B678063FA4CF}"/>
+              </a:ext>
+            </a:extLst>
+          </p:cNvPr>
+          <p:cNvSpPr txBox="1"/>
+          <p:nvPr/>
+        </p:nvSpPr>
+        <p:spPr>
+          <a:xfrm>
+            <a:off x="1717578" y="11825966"/>
+            <a:ext cx="13742639" cy="4524315"/>
+          </a:xfrm>
+          <a:prstGeom prst="rect">
+            <a:avLst/>
+          </a:prstGeom>
+          <a:noFill/>
+        </p:spPr>
+        <p:txBody>
+          <a:bodyPr wrap="square">
+            <a:spAutoFit/>
+          </a:bodyPr>
+          <a:lstStyle/>
+          <a:p>
+            <a:pPr algn="just"/>
+            <a:r>
+              <a:rPr lang="es-ES" sz="3200" dirty="0">
                 <a:latin typeface="Arial" panose="020B0604020202020204" pitchFamily="34" charset="0"/>
                 <a:cs typeface="Arial" panose="020B0604020202020204" pitchFamily="34" charset="0"/>
               </a:rPr>
-              <a:t>Resultados</a:t>
-            </a:r>
-            <a:r>
-              <a:rPr lang="es-ES" sz="4501" b="1" dirty="0">
-                <a:solidFill>
-                  <a:schemeClr val="accent1">
-                    <a:lumMod val="50000"/>
-                  </a:schemeClr>
-                </a:solidFill>
+              <a:t>Arial 32, justificado. Las medidas del cartel (80 cm de ancho y 110 cm de altura), el diseño del contenido es libre. Se recomiendan para figuras los formatos (JPG, PNG o PDF, con resolución de 300 dpi).</a:t>
+            </a:r>
+          </a:p>
+          <a:p>
+            <a:pPr algn="just"/>
+            <a:r>
+              <a:rPr lang="es-ES" sz="3200" dirty="0">
                 <a:latin typeface="Arial" panose="020B0604020202020204" pitchFamily="34" charset="0"/>
                 <a:cs typeface="Arial" panose="020B0604020202020204" pitchFamily="34" charset="0"/>
               </a:rPr>
-              <a:t> </a:t>
-            </a:r>
-            <a:endParaRPr lang="es-MX" sz="4501" b="1" dirty="0">
-              <a:solidFill>
-                <a:schemeClr val="accent1">
-                  <a:lumMod val="50000"/>
-                </a:schemeClr>
-              </a:solidFill>
+              <a:t>En esta sección debe abordar la introducción, problemática y justificación. Respaldar la información citando referencias con número entre corchetes, por ejemplo [1]. El punto al final de la oración sigue después del corchete [2]. Escriba nada más el número de referencia, por ejemplo, [3]. No escriba “Ref. [3]” o “referencia [3] excepto al inicio de una oración: “La referencia [3] muestra….” . Al final de este apartado definir el objetivo del trabajo.</a:t>
+            </a:r>
+            <a:endParaRPr lang="es-MX" sz="3200" dirty="0">
               <a:latin typeface="Arial" panose="020B0604020202020204" pitchFamily="34" charset="0"/>
               <a:cs typeface="Arial" panose="020B0604020202020204" pitchFamily="34" charset="0"/>
             </a:endParaRPr>
@@ -3882,10 +3769,10 @@
       </p:sp>
       <p:sp>
         <p:nvSpPr>
-          <p:cNvPr id="46" name="Rectángulo 45">
+          <p:cNvPr id="8" name="Rectángulo 7">
             <a:extLst>
               <a:ext uri="{FF2B5EF4-FFF2-40B4-BE49-F238E27FC236}">
-                <a16:creationId xmlns:a16="http://schemas.microsoft.com/office/drawing/2014/main" id="{7F1A71B6-2524-982D-087B-1958B4727572}"/>
+                <a16:creationId xmlns:a16="http://schemas.microsoft.com/office/drawing/2014/main" id="{6969D5B1-351D-F78A-CF97-914B319D243F}"/>
               </a:ext>
             </a:extLst>
           </p:cNvPr>
@@ -3894,13 +3781,15 @@
         </p:nvSpPr>
         <p:spPr>
           <a:xfrm>
-            <a:off x="15564275" y="19147781"/>
-            <a:ext cx="11880743" cy="1251856"/>
+            <a:off x="23828515" y="15025772"/>
+            <a:ext cx="6333339" cy="3515691"/>
           </a:xfrm>
           <a:prstGeom prst="rect">
             <a:avLst/>
           </a:prstGeom>
-          <a:noFill/>
+          <a:solidFill>
+            <a:srgbClr val="B8163B"/>
+          </a:solidFill>
           <a:ln>
             <a:noFill/>
           </a:ln>
@@ -3925,117 +3814,27 @@
           <a:bodyPr rtlCol="0" anchor="ctr"/>
           <a:lstStyle/>
           <a:p>
-            <a:r>
-              <a:rPr lang="es-ES" sz="4200" b="1" dirty="0">
-                <a:solidFill>
-                  <a:schemeClr val="accent1">
-                    <a:lumMod val="50000"/>
-                  </a:schemeClr>
-                </a:solidFill>
-                <a:latin typeface="Arial" panose="020B0604020202020204" pitchFamily="34" charset="0"/>
-                <a:cs typeface="Arial" panose="020B0604020202020204" pitchFamily="34" charset="0"/>
-              </a:rPr>
-              <a:t>Conclusiones</a:t>
-            </a:r>
-            <a:endParaRPr lang="es-MX" sz="4200" b="1" dirty="0">
-              <a:solidFill>
-                <a:schemeClr val="accent1">
-                  <a:lumMod val="50000"/>
-                </a:schemeClr>
-              </a:solidFill>
-              <a:latin typeface="Arial" panose="020B0604020202020204" pitchFamily="34" charset="0"/>
-              <a:cs typeface="Arial" panose="020B0604020202020204" pitchFamily="34" charset="0"/>
-            </a:endParaRPr>
-          </a:p>
-        </p:txBody>
-      </p:sp>
-      <p:sp>
-        <p:nvSpPr>
-          <p:cNvPr id="52" name="Rectángulo 51">
+            <a:pPr algn="ctr"/>
+            <a:r>
+              <a:rPr lang="es-419" sz="3200" dirty="0"/>
+              <a:t>COLOCAR IMÁGENES</a:t>
+            </a:r>
+          </a:p>
+          <a:p>
+            <a:pPr algn="ctr"/>
+            <a:r>
+              <a:rPr lang="es-419" sz="3200" dirty="0"/>
+              <a:t>O GRÁFICOS</a:t>
+            </a:r>
+          </a:p>
+        </p:txBody>
+      </p:sp>
+      <p:sp>
+        <p:nvSpPr>
+          <p:cNvPr id="9" name="CuadroTexto 8">
             <a:extLst>
               <a:ext uri="{FF2B5EF4-FFF2-40B4-BE49-F238E27FC236}">
-                <a16:creationId xmlns:a16="http://schemas.microsoft.com/office/drawing/2014/main" id="{143BC100-7746-C138-8C2B-78762CCA6D1F}"/>
-              </a:ext>
-            </a:extLst>
-          </p:cNvPr>
-          <p:cNvSpPr/>
-          <p:nvPr/>
-        </p:nvSpPr>
-        <p:spPr>
-          <a:xfrm>
-            <a:off x="15461781" y="29103040"/>
-            <a:ext cx="12443808" cy="1251856"/>
-          </a:xfrm>
-          <a:prstGeom prst="rect">
-            <a:avLst/>
-          </a:prstGeom>
-          <a:noFill/>
-          <a:ln>
-            <a:noFill/>
-          </a:ln>
-        </p:spPr>
-        <p:style>
-          <a:lnRef idx="2">
-            <a:schemeClr val="accent1">
-              <a:shade val="15000"/>
-            </a:schemeClr>
-          </a:lnRef>
-          <a:fillRef idx="1">
-            <a:schemeClr val="accent1"/>
-          </a:fillRef>
-          <a:effectRef idx="0">
-            <a:schemeClr val="accent1"/>
-          </a:effectRef>
-          <a:fontRef idx="minor">
-            <a:schemeClr val="lt1"/>
-          </a:fontRef>
-        </p:style>
-        <p:txBody>
-          <a:bodyPr rtlCol="0" anchor="ctr"/>
-          <a:lstStyle/>
-          <a:p>
-            <a:r>
-              <a:rPr lang="es-ES" sz="4200" b="1" dirty="0">
-                <a:solidFill>
-                  <a:schemeClr val="accent1">
-                    <a:lumMod val="50000"/>
-                  </a:schemeClr>
-                </a:solidFill>
-                <a:latin typeface="Arial" panose="020B0604020202020204" pitchFamily="34" charset="0"/>
-                <a:cs typeface="Arial" panose="020B0604020202020204" pitchFamily="34" charset="0"/>
-              </a:rPr>
-              <a:t>Agradecimientos (opcional)</a:t>
-            </a:r>
-            <a:r>
-              <a:rPr lang="es-ES" sz="4501" b="1" dirty="0">
-                <a:solidFill>
-                  <a:schemeClr val="accent1">
-                    <a:lumMod val="50000"/>
-                  </a:schemeClr>
-                </a:solidFill>
-                <a:latin typeface="Arial" panose="020B0604020202020204" pitchFamily="34" charset="0"/>
-                <a:cs typeface="Arial" panose="020B0604020202020204" pitchFamily="34" charset="0"/>
-              </a:rPr>
-              <a:t> </a:t>
-            </a:r>
-            <a:endParaRPr lang="es-MX" sz="4501" b="1" dirty="0">
-              <a:solidFill>
-                <a:schemeClr val="accent1">
-                  <a:lumMod val="50000"/>
-                </a:schemeClr>
-              </a:solidFill>
-              <a:latin typeface="Arial" panose="020B0604020202020204" pitchFamily="34" charset="0"/>
-              <a:cs typeface="Arial" panose="020B0604020202020204" pitchFamily="34" charset="0"/>
-            </a:endParaRPr>
-          </a:p>
-        </p:txBody>
-      </p:sp>
-      <p:sp>
-        <p:nvSpPr>
-          <p:cNvPr id="53" name="CuadroTexto 52">
-            <a:extLst>
-              <a:ext uri="{FF2B5EF4-FFF2-40B4-BE49-F238E27FC236}">
-                <a16:creationId xmlns:a16="http://schemas.microsoft.com/office/drawing/2014/main" id="{09CA8AE2-65BC-2AA5-4B63-A2F3240553D6}"/>
+                <a16:creationId xmlns:a16="http://schemas.microsoft.com/office/drawing/2014/main" id="{FA4B1A0D-F6EC-6064-6334-CA9DADC9449C}"/>
               </a:ext>
             </a:extLst>
           </p:cNvPr>
@@ -4044,8 +3843,8 @@
         </p:nvSpPr>
         <p:spPr>
           <a:xfrm>
-            <a:off x="1073874" y="11595825"/>
-            <a:ext cx="12443808" cy="5509200"/>
+            <a:off x="17042865" y="35098184"/>
+            <a:ext cx="13602167" cy="584775"/>
           </a:xfrm>
           <a:prstGeom prst="rect">
             <a:avLst/>
@@ -4064,17 +3863,7 @@
                 <a:latin typeface="Arial" panose="020B0604020202020204" pitchFamily="34" charset="0"/>
                 <a:cs typeface="Arial" panose="020B0604020202020204" pitchFamily="34" charset="0"/>
               </a:rPr>
-              <a:t>Arial 32, justificado. Las medidas del cartel (80 cm de ancho y 110 cm de altura), el diseño del contenido es libre. Se recomiendan para figuras los formatos (JPG, PNG o PDF, con resolución de 300 dpi).</a:t>
-            </a:r>
-          </a:p>
-          <a:p>
-            <a:pPr algn="just"/>
-            <a:r>
-              <a:rPr lang="es-ES" sz="3200" dirty="0">
-                <a:latin typeface="Arial" panose="020B0604020202020204" pitchFamily="34" charset="0"/>
-                <a:cs typeface="Arial" panose="020B0604020202020204" pitchFamily="34" charset="0"/>
-              </a:rPr>
-              <a:t>En esta sección debe abordar la introducción, problemática y justificación. Respaldar la información citando referencias con número entre corchetes, por ejemplo [1]. El punto al final de la oración sigue después del corchete [2]. Escriba nada más el número de referencia, por ejemplo, [3]. No escriba “Ref. [3]” o “referencia [3] excepto al inicio de una oración: “La referencia [3] muestra….” . Al final de este apartado definir el objetivo del trabajo.</a:t>
+              <a:t>Arial 32, justificado. Fuente de financiamiento de la investigación</a:t>
             </a:r>
             <a:endParaRPr lang="es-MX" sz="3200" dirty="0">
               <a:latin typeface="Arial" panose="020B0604020202020204" pitchFamily="34" charset="0"/>
@@ -4085,10 +3874,10 @@
       </p:sp>
       <p:sp>
         <p:nvSpPr>
-          <p:cNvPr id="56" name="CuadroTexto 55">
+          <p:cNvPr id="2" name="CuadroTexto 1">
             <a:extLst>
               <a:ext uri="{FF2B5EF4-FFF2-40B4-BE49-F238E27FC236}">
-                <a16:creationId xmlns:a16="http://schemas.microsoft.com/office/drawing/2014/main" id="{EA8C5332-4641-A5C0-7C4F-482B2AEC0243}"/>
+                <a16:creationId xmlns:a16="http://schemas.microsoft.com/office/drawing/2014/main" id="{D57D3553-3BFD-D84D-63A7-C47B3B4FD095}"/>
               </a:ext>
             </a:extLst>
           </p:cNvPr>
@@ -4097,13 +3886,15 @@
         </p:nvSpPr>
         <p:spPr>
           <a:xfrm>
-            <a:off x="939623" y="24171359"/>
-            <a:ext cx="12578059" cy="3539430"/>
+            <a:off x="24535766" y="3472437"/>
+            <a:ext cx="720000" cy="830997"/>
           </a:xfrm>
           <a:prstGeom prst="rect">
             <a:avLst/>
           </a:prstGeom>
-          <a:noFill/>
+          <a:solidFill>
+            <a:schemeClr val="bg1"/>
+          </a:solidFill>
         </p:spPr>
         <p:txBody>
           <a:bodyPr wrap="square" rtlCol="0">
@@ -4111,683 +3902,22 @@
           </a:bodyPr>
           <a:lstStyle/>
           <a:p>
-            <a:pPr algn="just"/>
-            <a:r>
-              <a:rPr lang="es-ES" sz="3200" dirty="0">
-                <a:latin typeface="Arial" panose="020B0604020202020204" pitchFamily="34" charset="0"/>
-                <a:cs typeface="Arial" panose="020B0604020202020204" pitchFamily="34" charset="0"/>
+            <a:r>
+              <a:rPr lang="es-ES_tradnl" sz="4800" b="1" dirty="0">
+                <a:solidFill>
+                  <a:srgbClr val="88133A"/>
+                </a:solidFill>
+                <a:latin typeface="Bernard MT Condensed" panose="02050806060905020404" pitchFamily="18" charset="77"/>
               </a:rPr>
-              <a:t>Arial 32, justificado. Describir la metodología de forma clara y las técnicas aplicadas. Citar con números entre corchetes los métodos ya publicados y si fueron modificados, indicando la modificación. Se pueden incluir tablas y figuras, así como las ecuaciones si el autor lo considera oportuno. Las tablas y figuras irán numeradas en orden de aparición, como título las tablas y pie de figuras en las figuras.</a:t>
-            </a:r>
-          </a:p>
-          <a:p>
-            <a:pPr algn="just"/>
-            <a:endParaRPr lang="es-MX" sz="3200" dirty="0">
-              <a:latin typeface="Arial" panose="020B0604020202020204" pitchFamily="34" charset="0"/>
-              <a:cs typeface="Arial" panose="020B0604020202020204" pitchFamily="34" charset="0"/>
-            </a:endParaRPr>
-          </a:p>
-        </p:txBody>
-      </p:sp>
-      <p:sp>
-        <p:nvSpPr>
-          <p:cNvPr id="59" name="CuadroTexto 58">
-            <a:extLst>
-              <a:ext uri="{FF2B5EF4-FFF2-40B4-BE49-F238E27FC236}">
-                <a16:creationId xmlns:a16="http://schemas.microsoft.com/office/drawing/2014/main" id="{46006A98-6DC2-33FF-DF6A-C8F5D0762EDE}"/>
-              </a:ext>
-            </a:extLst>
-          </p:cNvPr>
-          <p:cNvSpPr txBox="1"/>
-          <p:nvPr/>
-        </p:nvSpPr>
-        <p:spPr>
-          <a:xfrm>
-            <a:off x="15461781" y="20256094"/>
-            <a:ext cx="12331896" cy="2062103"/>
-          </a:xfrm>
-          <a:prstGeom prst="rect">
-            <a:avLst/>
-          </a:prstGeom>
-          <a:noFill/>
-        </p:spPr>
-        <p:txBody>
-          <a:bodyPr wrap="square" rtlCol="0">
-            <a:spAutoFit/>
-          </a:bodyPr>
-          <a:lstStyle/>
-          <a:p>
-            <a:pPr algn="just"/>
-            <a:r>
-              <a:rPr lang="es-ES" sz="3200" dirty="0">
-                <a:latin typeface="Arial" panose="020B0604020202020204" pitchFamily="34" charset="0"/>
-                <a:cs typeface="Arial" panose="020B0604020202020204" pitchFamily="34" charset="0"/>
-              </a:rPr>
-              <a:t>Arial 32, justificado. En esta sección el autor puede agregar observaciones, reflexiones, recomendaciones, sugerencias adicionales y conclusiones relacionadas con el tema tratado en el estudio.</a:t>
-            </a:r>
-            <a:endParaRPr lang="es-MX" sz="3200" dirty="0">
-              <a:latin typeface="Arial" panose="020B0604020202020204" pitchFamily="34" charset="0"/>
-              <a:cs typeface="Arial" panose="020B0604020202020204" pitchFamily="34" charset="0"/>
-            </a:endParaRPr>
-          </a:p>
-        </p:txBody>
-      </p:sp>
-      <p:sp>
-        <p:nvSpPr>
-          <p:cNvPr id="74" name="CuadroTexto 73">
-            <a:extLst>
-              <a:ext uri="{FF2B5EF4-FFF2-40B4-BE49-F238E27FC236}">
-                <a16:creationId xmlns:a16="http://schemas.microsoft.com/office/drawing/2014/main" id="{6ABF8E4A-B00D-B512-8CA1-A05A31A342D4}"/>
-              </a:ext>
-            </a:extLst>
-          </p:cNvPr>
-          <p:cNvSpPr txBox="1"/>
-          <p:nvPr/>
-        </p:nvSpPr>
-        <p:spPr>
-          <a:xfrm>
-            <a:off x="15461781" y="30346844"/>
-            <a:ext cx="14245488" cy="584775"/>
-          </a:xfrm>
-          <a:prstGeom prst="rect">
-            <a:avLst/>
-          </a:prstGeom>
-          <a:noFill/>
-        </p:spPr>
-        <p:txBody>
-          <a:bodyPr wrap="square" rtlCol="0">
-            <a:spAutoFit/>
-          </a:bodyPr>
-          <a:lstStyle/>
-          <a:p>
-            <a:pPr algn="just"/>
-            <a:r>
-              <a:rPr lang="es-ES" sz="3200" dirty="0">
-                <a:latin typeface="Arial" panose="020B0604020202020204" pitchFamily="34" charset="0"/>
-                <a:cs typeface="Arial" panose="020B0604020202020204" pitchFamily="34" charset="0"/>
-              </a:rPr>
-              <a:t>Arial 32, justificado. Fuente de financiamiento de la investigación.</a:t>
-            </a:r>
-            <a:endParaRPr lang="es-MX" sz="3200" dirty="0">
-              <a:latin typeface="Arial" panose="020B0604020202020204" pitchFamily="34" charset="0"/>
-              <a:cs typeface="Arial" panose="020B0604020202020204" pitchFamily="34" charset="0"/>
-            </a:endParaRPr>
-          </a:p>
-        </p:txBody>
-      </p:sp>
-      <p:sp>
-        <p:nvSpPr>
-          <p:cNvPr id="75" name="CuadroTexto 74">
-            <a:extLst>
-              <a:ext uri="{FF2B5EF4-FFF2-40B4-BE49-F238E27FC236}">
-                <a16:creationId xmlns:a16="http://schemas.microsoft.com/office/drawing/2014/main" id="{86C0DAD9-1C37-3F45-03C5-BA6236F611C8}"/>
-              </a:ext>
-            </a:extLst>
-          </p:cNvPr>
-          <p:cNvSpPr txBox="1"/>
-          <p:nvPr/>
-        </p:nvSpPr>
-        <p:spPr>
-          <a:xfrm>
-            <a:off x="15282743" y="11611739"/>
-            <a:ext cx="12443808" cy="2062103"/>
-          </a:xfrm>
-          <a:prstGeom prst="rect">
-            <a:avLst/>
-          </a:prstGeom>
-          <a:noFill/>
-        </p:spPr>
-        <p:txBody>
-          <a:bodyPr wrap="square" rtlCol="0">
-            <a:spAutoFit/>
-          </a:bodyPr>
-          <a:lstStyle/>
-          <a:p>
-            <a:pPr algn="just"/>
-            <a:r>
-              <a:rPr lang="es-ES" sz="3200" dirty="0">
-                <a:latin typeface="Arial" panose="020B0604020202020204" pitchFamily="34" charset="0"/>
-                <a:cs typeface="Arial" panose="020B0604020202020204" pitchFamily="34" charset="0"/>
-              </a:rPr>
-              <a:t>Arial 32, justificado. Esta sección puede ser expresada en texto o incluir tablas y figuras. Las tablas y figuras deberán ser numeradas en orden de aparición. Se incluye la discusión de los resultados mencionados, También cite con número entre corchetes.</a:t>
-            </a:r>
-            <a:endParaRPr lang="es-MX" sz="3200" dirty="0">
-              <a:latin typeface="Arial" panose="020B0604020202020204" pitchFamily="34" charset="0"/>
-              <a:cs typeface="Arial" panose="020B0604020202020204" pitchFamily="34" charset="0"/>
-            </a:endParaRPr>
-          </a:p>
-        </p:txBody>
-      </p:sp>
-      <p:sp>
-        <p:nvSpPr>
-          <p:cNvPr id="2" name="Rectángulo 1">
-            <a:extLst>
-              <a:ext uri="{FF2B5EF4-FFF2-40B4-BE49-F238E27FC236}">
-                <a16:creationId xmlns:a16="http://schemas.microsoft.com/office/drawing/2014/main" id="{33A78EC1-1C62-891A-63B9-65248C543728}"/>
-              </a:ext>
-            </a:extLst>
-          </p:cNvPr>
-          <p:cNvSpPr/>
-          <p:nvPr/>
-        </p:nvSpPr>
-        <p:spPr>
-          <a:xfrm>
-            <a:off x="939623" y="18295364"/>
-            <a:ext cx="13517304" cy="1251856"/>
-          </a:xfrm>
-          <a:prstGeom prst="rect">
-            <a:avLst/>
-          </a:prstGeom>
-          <a:noFill/>
-          <a:ln>
-            <a:noFill/>
-          </a:ln>
-        </p:spPr>
-        <p:style>
-          <a:lnRef idx="2">
-            <a:schemeClr val="accent1">
-              <a:shade val="15000"/>
-            </a:schemeClr>
-          </a:lnRef>
-          <a:fillRef idx="1">
-            <a:schemeClr val="accent1"/>
-          </a:fillRef>
-          <a:effectRef idx="0">
-            <a:schemeClr val="accent1"/>
-          </a:effectRef>
-          <a:fontRef idx="minor">
-            <a:schemeClr val="lt1"/>
-          </a:fontRef>
-        </p:style>
-        <p:txBody>
-          <a:bodyPr rtlCol="0" anchor="ctr"/>
-          <a:lstStyle/>
-          <a:p>
-            <a:r>
-              <a:rPr lang="es-ES" sz="4200" b="1" dirty="0">
-                <a:solidFill>
-                  <a:schemeClr val="accent1">
-                    <a:lumMod val="50000"/>
-                  </a:schemeClr>
-                </a:solidFill>
-                <a:latin typeface="Arial" panose="020B0604020202020204" pitchFamily="34" charset="0"/>
-                <a:cs typeface="Arial" panose="020B0604020202020204" pitchFamily="34" charset="0"/>
-              </a:rPr>
-              <a:t>Objetivos</a:t>
-            </a:r>
-            <a:endParaRPr lang="es-MX" sz="4501" b="1" dirty="0">
-              <a:solidFill>
-                <a:schemeClr val="accent1">
-                  <a:lumMod val="50000"/>
-                </a:schemeClr>
-              </a:solidFill>
-              <a:latin typeface="Arial" panose="020B0604020202020204" pitchFamily="34" charset="0"/>
-              <a:cs typeface="Arial" panose="020B0604020202020204" pitchFamily="34" charset="0"/>
-            </a:endParaRPr>
-          </a:p>
-        </p:txBody>
-      </p:sp>
-      <p:sp>
-        <p:nvSpPr>
-          <p:cNvPr id="8" name="CuadroTexto 7">
-            <a:extLst>
-              <a:ext uri="{FF2B5EF4-FFF2-40B4-BE49-F238E27FC236}">
-                <a16:creationId xmlns:a16="http://schemas.microsoft.com/office/drawing/2014/main" id="{5C3F192C-12C0-65D7-038B-64E83E69D640}"/>
-              </a:ext>
-            </a:extLst>
-          </p:cNvPr>
-          <p:cNvSpPr txBox="1"/>
-          <p:nvPr/>
-        </p:nvSpPr>
-        <p:spPr>
-          <a:xfrm>
-            <a:off x="1006748" y="19313285"/>
-            <a:ext cx="12578059" cy="1077218"/>
-          </a:xfrm>
-          <a:prstGeom prst="rect">
-            <a:avLst/>
-          </a:prstGeom>
-          <a:noFill/>
-        </p:spPr>
-        <p:txBody>
-          <a:bodyPr wrap="square" rtlCol="0">
-            <a:spAutoFit/>
-          </a:bodyPr>
-          <a:lstStyle/>
-          <a:p>
-            <a:pPr algn="just"/>
-            <a:r>
-              <a:rPr lang="es-ES" sz="3200" dirty="0">
-                <a:latin typeface="Arial" panose="020B0604020202020204" pitchFamily="34" charset="0"/>
-                <a:cs typeface="Arial" panose="020B0604020202020204" pitchFamily="34" charset="0"/>
-              </a:rPr>
-              <a:t>Arial 32, justificado. Describir el objetivo general del trabajo.</a:t>
-            </a:r>
-          </a:p>
-          <a:p>
-            <a:pPr algn="just"/>
-            <a:endParaRPr lang="es-MX" sz="3200" dirty="0">
-              <a:latin typeface="Arial" panose="020B0604020202020204" pitchFamily="34" charset="0"/>
-              <a:cs typeface="Arial" panose="020B0604020202020204" pitchFamily="34" charset="0"/>
-            </a:endParaRPr>
-          </a:p>
-        </p:txBody>
-      </p:sp>
-      <p:grpSp>
-        <p:nvGrpSpPr>
-          <p:cNvPr id="3" name="Grupo 2">
-            <a:extLst>
-              <a:ext uri="{FF2B5EF4-FFF2-40B4-BE49-F238E27FC236}">
-                <a16:creationId xmlns:a16="http://schemas.microsoft.com/office/drawing/2014/main" id="{DC258C0A-1E97-8BBF-1592-56B6756E3A80}"/>
-              </a:ext>
-            </a:extLst>
-          </p:cNvPr>
-          <p:cNvGrpSpPr>
-            <a:grpSpLocks noChangeAspect="1"/>
-          </p:cNvGrpSpPr>
-          <p:nvPr/>
-        </p:nvGrpSpPr>
-        <p:grpSpPr>
-          <a:xfrm>
-            <a:off x="1171573" y="204953"/>
-            <a:ext cx="26622104" cy="5897818"/>
-            <a:chOff x="0" y="56270"/>
-            <a:chExt cx="12192000" cy="2700996"/>
-          </a:xfrm>
-        </p:grpSpPr>
-        <p:sp>
-          <p:nvSpPr>
-            <p:cNvPr id="4" name="Rectángulo redondeado 3">
-              <a:extLst>
-                <a:ext uri="{FF2B5EF4-FFF2-40B4-BE49-F238E27FC236}">
-                  <a16:creationId xmlns:a16="http://schemas.microsoft.com/office/drawing/2014/main" id="{1D9280D0-9964-664B-14B8-7BD1EEE739C6}"/>
-                </a:ext>
-              </a:extLst>
-            </p:cNvPr>
-            <p:cNvSpPr/>
-            <p:nvPr/>
-          </p:nvSpPr>
-          <p:spPr>
-            <a:xfrm>
-              <a:off x="0" y="56270"/>
-              <a:ext cx="12192000" cy="2700996"/>
-            </a:xfrm>
-            <a:prstGeom prst="roundRect">
-              <a:avLst/>
-            </a:prstGeom>
-            <a:noFill/>
-            <a:ln>
-              <a:noFill/>
-            </a:ln>
-          </p:spPr>
-          <p:style>
-            <a:lnRef idx="2">
-              <a:schemeClr val="accent1">
-                <a:shade val="15000"/>
-              </a:schemeClr>
-            </a:lnRef>
-            <a:fillRef idx="1">
-              <a:schemeClr val="accent1"/>
-            </a:fillRef>
-            <a:effectRef idx="0">
-              <a:schemeClr val="accent1"/>
-            </a:effectRef>
-            <a:fontRef idx="minor">
-              <a:schemeClr val="lt1"/>
-            </a:fontRef>
-          </p:style>
-          <p:txBody>
-            <a:bodyPr rtlCol="0" anchor="ctr"/>
-            <a:lstStyle/>
-            <a:p>
-              <a:pPr algn="ctr"/>
-              <a:endParaRPr lang="es-ES_tradnl"/>
-            </a:p>
-          </p:txBody>
-        </p:sp>
-        <p:pic>
-          <p:nvPicPr>
-            <p:cNvPr id="5" name="Image 11">
-              <a:extLst>
-                <a:ext uri="{FF2B5EF4-FFF2-40B4-BE49-F238E27FC236}">
-                  <a16:creationId xmlns:a16="http://schemas.microsoft.com/office/drawing/2014/main" id="{6A986A75-5B68-ACA8-F735-A7E45447DFEE}"/>
-                </a:ext>
-              </a:extLst>
-            </p:cNvPr>
-            <p:cNvPicPr>
-              <a:picLocks noChangeAspect="1"/>
-            </p:cNvPicPr>
-            <p:nvPr/>
-          </p:nvPicPr>
-          <p:blipFill rotWithShape="1">
-            <a:blip r:embed="rId4" cstate="print">
-              <a:clrChange>
-                <a:clrFrom>
-                  <a:srgbClr val="FFFFFF"/>
-                </a:clrFrom>
-                <a:clrTo>
-                  <a:srgbClr val="FFFFFF">
-                    <a:alpha val="0"/>
-                  </a:srgbClr>
-                </a:clrTo>
-              </a:clrChange>
-            </a:blip>
-            <a:srcRect b="92030"/>
-            <a:stretch/>
-          </p:blipFill>
-          <p:spPr bwMode="auto">
-            <a:xfrm>
-              <a:off x="218978" y="325836"/>
-              <a:ext cx="11754044" cy="1185903"/>
-            </a:xfrm>
-            <a:prstGeom prst="rect">
-              <a:avLst/>
-            </a:prstGeom>
-            <a:noFill/>
-            <a:ln>
-              <a:noFill/>
-            </a:ln>
-            <a:extLst>
-              <a:ext uri="{53640926-AAD7-44D8-BBD7-CCE9431645EC}">
-                <a14:shadowObscured xmlns:a14="http://schemas.microsoft.com/office/drawing/2010/main"/>
-              </a:ext>
-            </a:extLst>
-          </p:spPr>
-        </p:pic>
-        <p:pic>
-          <p:nvPicPr>
-            <p:cNvPr id="6" name="Imagen 5">
-              <a:extLst>
-                <a:ext uri="{FF2B5EF4-FFF2-40B4-BE49-F238E27FC236}">
-                  <a16:creationId xmlns:a16="http://schemas.microsoft.com/office/drawing/2014/main" id="{7F92E600-F34F-770E-81B8-0FE425425D4A}"/>
-                </a:ext>
-              </a:extLst>
-            </p:cNvPr>
-            <p:cNvPicPr>
-              <a:picLocks noChangeAspect="1"/>
-            </p:cNvPicPr>
-            <p:nvPr/>
-          </p:nvPicPr>
-          <p:blipFill>
-            <a:blip r:embed="rId5"/>
-            <a:srcRect l="21446" r="22405" b="26391"/>
-            <a:stretch>
-              <a:fillRect/>
-            </a:stretch>
-          </p:blipFill>
-          <p:spPr>
-            <a:xfrm>
-              <a:off x="6177787" y="1760255"/>
-              <a:ext cx="559113" cy="720000"/>
-            </a:xfrm>
-            <a:prstGeom prst="rect">
-              <a:avLst/>
-            </a:prstGeom>
-          </p:spPr>
-        </p:pic>
-        <p:pic>
-          <p:nvPicPr>
-            <p:cNvPr id="7" name="Imagen 6">
-              <a:extLst>
-                <a:ext uri="{FF2B5EF4-FFF2-40B4-BE49-F238E27FC236}">
-                  <a16:creationId xmlns:a16="http://schemas.microsoft.com/office/drawing/2014/main" id="{FC5FB203-D5EA-676F-C28E-0DAB9D35927C}"/>
-                </a:ext>
-              </a:extLst>
-            </p:cNvPr>
-            <p:cNvPicPr>
-              <a:picLocks noChangeAspect="1"/>
-            </p:cNvPicPr>
-            <p:nvPr/>
-          </p:nvPicPr>
-          <p:blipFill>
-            <a:blip r:embed="rId6">
-              <a:clrChange>
-                <a:clrFrom>
-                  <a:srgbClr val="FEFFFF"/>
-                </a:clrFrom>
-                <a:clrTo>
-                  <a:srgbClr val="FEFFFF">
-                    <a:alpha val="0"/>
-                  </a:srgbClr>
-                </a:clrTo>
-              </a:clrChange>
-            </a:blip>
-            <a:srcRect l="19252" r="19282" b="14767"/>
-            <a:stretch>
-              <a:fillRect/>
-            </a:stretch>
-          </p:blipFill>
-          <p:spPr>
-            <a:xfrm>
-              <a:off x="9283656" y="1760255"/>
-              <a:ext cx="604412" cy="720000"/>
-            </a:xfrm>
-            <a:prstGeom prst="rect">
-              <a:avLst/>
-            </a:prstGeom>
-          </p:spPr>
-        </p:pic>
-        <p:pic>
-          <p:nvPicPr>
-            <p:cNvPr id="9" name="Imagen 8">
-              <a:extLst>
-                <a:ext uri="{FF2B5EF4-FFF2-40B4-BE49-F238E27FC236}">
-                  <a16:creationId xmlns:a16="http://schemas.microsoft.com/office/drawing/2014/main" id="{CD5C537B-5EA8-B8CF-0B50-549A217913A2}"/>
-                </a:ext>
-              </a:extLst>
-            </p:cNvPr>
-            <p:cNvPicPr>
-              <a:picLocks noChangeAspect="1"/>
-            </p:cNvPicPr>
-            <p:nvPr/>
-          </p:nvPicPr>
-          <p:blipFill>
-            <a:blip r:embed="rId7"/>
-            <a:srcRect l="2874" t="6793" r="69202" b="5297"/>
-            <a:stretch>
-              <a:fillRect/>
-            </a:stretch>
-          </p:blipFill>
-          <p:spPr>
-            <a:xfrm>
-              <a:off x="8164397" y="1760255"/>
-              <a:ext cx="763934" cy="720000"/>
-            </a:xfrm>
-            <a:prstGeom prst="rect">
-              <a:avLst/>
-            </a:prstGeom>
-          </p:spPr>
-        </p:pic>
-        <p:pic>
-          <p:nvPicPr>
-            <p:cNvPr id="10" name="Imagen 9">
-              <a:extLst>
-                <a:ext uri="{FF2B5EF4-FFF2-40B4-BE49-F238E27FC236}">
-                  <a16:creationId xmlns:a16="http://schemas.microsoft.com/office/drawing/2014/main" id="{7A2CF86F-9733-0FE3-58C6-9BA809A25126}"/>
-                </a:ext>
-              </a:extLst>
-            </p:cNvPr>
-            <p:cNvPicPr>
-              <a:picLocks noChangeAspect="1"/>
-            </p:cNvPicPr>
-            <p:nvPr/>
-          </p:nvPicPr>
-          <p:blipFill>
-            <a:blip r:embed="rId8"/>
-            <a:srcRect l="4177" r="4005"/>
-            <a:stretch>
-              <a:fillRect/>
-            </a:stretch>
-          </p:blipFill>
-          <p:spPr>
-            <a:xfrm>
-              <a:off x="7092225" y="1760255"/>
-              <a:ext cx="716847" cy="720000"/>
-            </a:xfrm>
-            <a:prstGeom prst="ellipse">
-              <a:avLst/>
-            </a:prstGeom>
-          </p:spPr>
-        </p:pic>
-        <p:pic>
-          <p:nvPicPr>
-            <p:cNvPr id="11" name="Imagen 10">
-              <a:extLst>
-                <a:ext uri="{FF2B5EF4-FFF2-40B4-BE49-F238E27FC236}">
-                  <a16:creationId xmlns:a16="http://schemas.microsoft.com/office/drawing/2014/main" id="{0A799A4F-A697-416C-491B-E2A25F58746D}"/>
-                </a:ext>
-              </a:extLst>
-            </p:cNvPr>
-            <p:cNvPicPr>
-              <a:picLocks noChangeAspect="1"/>
-            </p:cNvPicPr>
-            <p:nvPr/>
-          </p:nvPicPr>
-          <p:blipFill>
-            <a:blip r:embed="rId9">
-              <a:clrChange>
-                <a:clrFrom>
-                  <a:srgbClr val="FFFFFF"/>
-                </a:clrFrom>
-                <a:clrTo>
-                  <a:srgbClr val="FFFFFF">
-                    <a:alpha val="0"/>
-                  </a:srgbClr>
-                </a:clrTo>
-              </a:clrChange>
-            </a:blip>
-            <a:stretch>
-              <a:fillRect/>
-            </a:stretch>
-          </p:blipFill>
-          <p:spPr>
-            <a:xfrm>
-              <a:off x="10243393" y="1760255"/>
-              <a:ext cx="751534" cy="720000"/>
-            </a:xfrm>
-            <a:prstGeom prst="rect">
-              <a:avLst/>
-            </a:prstGeom>
-          </p:spPr>
-        </p:pic>
-        <p:pic>
-          <p:nvPicPr>
-            <p:cNvPr id="12" name="Imagen 11">
-              <a:extLst>
-                <a:ext uri="{FF2B5EF4-FFF2-40B4-BE49-F238E27FC236}">
-                  <a16:creationId xmlns:a16="http://schemas.microsoft.com/office/drawing/2014/main" id="{D62B73EB-FCF8-BD66-42BA-FFEC6EC88F46}"/>
-                </a:ext>
-              </a:extLst>
-            </p:cNvPr>
-            <p:cNvPicPr>
-              <a:picLocks noChangeAspect="1"/>
-            </p:cNvPicPr>
-            <p:nvPr/>
-          </p:nvPicPr>
-          <p:blipFill>
-            <a:blip r:embed="rId10"/>
-            <a:stretch>
-              <a:fillRect/>
-            </a:stretch>
-          </p:blipFill>
-          <p:spPr>
-            <a:xfrm>
-              <a:off x="3542462" y="1760255"/>
-              <a:ext cx="2280000" cy="720000"/>
-            </a:xfrm>
-            <a:prstGeom prst="rect">
-              <a:avLst/>
-            </a:prstGeom>
-          </p:spPr>
-        </p:pic>
-        <p:pic>
-          <p:nvPicPr>
-            <p:cNvPr id="14" name="Imagen 13">
-              <a:extLst>
-                <a:ext uri="{FF2B5EF4-FFF2-40B4-BE49-F238E27FC236}">
-                  <a16:creationId xmlns:a16="http://schemas.microsoft.com/office/drawing/2014/main" id="{D77A89E0-A8C9-D044-6408-DD5A75C4A627}"/>
-                </a:ext>
-              </a:extLst>
-            </p:cNvPr>
-            <p:cNvPicPr>
-              <a:picLocks noChangeAspect="1"/>
-            </p:cNvPicPr>
-            <p:nvPr/>
-          </p:nvPicPr>
-          <p:blipFill>
-            <a:blip r:embed="rId11">
-              <a:clrChange>
-                <a:clrFrom>
-                  <a:srgbClr val="FFFFFF"/>
-                </a:clrFrom>
-                <a:clrTo>
-                  <a:srgbClr val="FFFFFF">
-                    <a:alpha val="0"/>
-                  </a:srgbClr>
-                </a:clrTo>
-              </a:clrChange>
-            </a:blip>
-            <a:srcRect r="68131"/>
-            <a:stretch>
-              <a:fillRect/>
-            </a:stretch>
-          </p:blipFill>
-          <p:spPr>
-            <a:xfrm>
-              <a:off x="2649683" y="1760255"/>
-              <a:ext cx="537454" cy="720000"/>
-            </a:xfrm>
-            <a:prstGeom prst="rect">
-              <a:avLst/>
-            </a:prstGeom>
-          </p:spPr>
-        </p:pic>
-        <p:pic>
-          <p:nvPicPr>
-            <p:cNvPr id="15" name="Imagen 14">
-              <a:extLst>
-                <a:ext uri="{FF2B5EF4-FFF2-40B4-BE49-F238E27FC236}">
-                  <a16:creationId xmlns:a16="http://schemas.microsoft.com/office/drawing/2014/main" id="{E0F63067-EC72-700D-CD42-36D94BA8EC24}"/>
-                </a:ext>
-              </a:extLst>
-            </p:cNvPr>
-            <p:cNvPicPr>
-              <a:picLocks noChangeAspect="1"/>
-            </p:cNvPicPr>
-            <p:nvPr/>
-          </p:nvPicPr>
-          <p:blipFill>
-            <a:blip r:embed="rId12">
-              <a:clrChange>
-                <a:clrFrom>
-                  <a:srgbClr val="FEFEFE"/>
-                </a:clrFrom>
-                <a:clrTo>
-                  <a:srgbClr val="FEFEFE">
-                    <a:alpha val="0"/>
-                  </a:srgbClr>
-                </a:clrTo>
-              </a:clrChange>
-            </a:blip>
-            <a:stretch>
-              <a:fillRect/>
-            </a:stretch>
-          </p:blipFill>
-          <p:spPr>
-            <a:xfrm>
-              <a:off x="1322358" y="1511739"/>
-              <a:ext cx="972000" cy="972000"/>
-            </a:xfrm>
-            <a:prstGeom prst="rect">
-              <a:avLst/>
-            </a:prstGeom>
-          </p:spPr>
-        </p:pic>
-      </p:grpSp>
+              <a:t>III</a:t>
+            </a:r>
+          </a:p>
+        </p:txBody>
+      </p:sp>
     </p:spTree>
     <p:extLst>
       <p:ext uri="{BB962C8B-B14F-4D97-AF65-F5344CB8AC3E}">
-        <p14:creationId xmlns:p14="http://schemas.microsoft.com/office/powerpoint/2010/main" val="3855694290"/>
+        <p14:creationId xmlns:p14="http://schemas.microsoft.com/office/powerpoint/2010/main" val="171777491"/>
       </p:ext>
     </p:extLst>
   </p:cSld>
@@ -4808,39 +3938,39 @@
         <a:sysClr val="window" lastClr="FFFFFF"/>
       </a:lt1>
       <a:dk2>
-        <a:srgbClr val="44546A"/>
+        <a:srgbClr val="0E2841"/>
       </a:dk2>
       <a:lt2>
-        <a:srgbClr val="E7E6E6"/>
+        <a:srgbClr val="E8E8E8"/>
       </a:lt2>
       <a:accent1>
-        <a:srgbClr val="4472C4"/>
+        <a:srgbClr val="156082"/>
       </a:accent1>
       <a:accent2>
-        <a:srgbClr val="ED7D31"/>
+        <a:srgbClr val="E97132"/>
       </a:accent2>
       <a:accent3>
-        <a:srgbClr val="A5A5A5"/>
+        <a:srgbClr val="196B24"/>
       </a:accent3>
       <a:accent4>
-        <a:srgbClr val="FFC000"/>
+        <a:srgbClr val="0F9ED5"/>
       </a:accent4>
       <a:accent5>
-        <a:srgbClr val="5B9BD5"/>
+        <a:srgbClr val="A02B93"/>
       </a:accent5>
       <a:accent6>
-        <a:srgbClr val="70AD47"/>
+        <a:srgbClr val="4EA72E"/>
       </a:accent6>
       <a:hlink>
-        <a:srgbClr val="0563C1"/>
+        <a:srgbClr val="467886"/>
       </a:hlink>
       <a:folHlink>
-        <a:srgbClr val="954F72"/>
+        <a:srgbClr val="96607D"/>
       </a:folHlink>
     </a:clrScheme>
     <a:fontScheme name="Tema de Office">
       <a:majorFont>
-        <a:latin typeface="Calibri Light" panose="020F0302020204030204"/>
+        <a:latin typeface="Aptos Display" panose="02110004020202020204"/>
         <a:ea typeface=""/>
         <a:cs typeface=""/>
         <a:font script="Jpan" typeface="游ゴシック Light"/>
@@ -4873,9 +4003,26 @@
         <a:font script="Viet" typeface="Times New Roman"/>
         <a:font script="Uigh" typeface="Microsoft Uighur"/>
         <a:font script="Geor" typeface="Sylfaen"/>
+        <a:font script="Armn" typeface="Arial"/>
+        <a:font script="Bugi" typeface="Leelawadee UI"/>
+        <a:font script="Bopo" typeface="Microsoft JhengHei"/>
+        <a:font script="Java" typeface="Javanese Text"/>
+        <a:font script="Lisu" typeface="Segoe UI"/>
+        <a:font script="Mymr" typeface="Myanmar Text"/>
+        <a:font script="Nkoo" typeface="Ebrima"/>
+        <a:font script="Olck" typeface="Nirmala UI"/>
+        <a:font script="Osma" typeface="Ebrima"/>
+        <a:font script="Phag" typeface="Phagspa"/>
+        <a:font script="Syrn" typeface="Estrangelo Edessa"/>
+        <a:font script="Syrj" typeface="Estrangelo Edessa"/>
+        <a:font script="Syre" typeface="Estrangelo Edessa"/>
+        <a:font script="Sora" typeface="Nirmala UI"/>
+        <a:font script="Tale" typeface="Microsoft Tai Le"/>
+        <a:font script="Talu" typeface="Microsoft New Tai Lue"/>
+        <a:font script="Tfng" typeface="Ebrima"/>
       </a:majorFont>
       <a:minorFont>
-        <a:latin typeface="Calibri" panose="020F0502020204030204"/>
+        <a:latin typeface="Aptos" panose="02110004020202020204"/>
         <a:ea typeface=""/>
         <a:cs typeface=""/>
         <a:font script="Jpan" typeface="游ゴシック"/>
@@ -4908,6 +4055,23 @@
         <a:font script="Viet" typeface="Arial"/>
         <a:font script="Uigh" typeface="Microsoft Uighur"/>
         <a:font script="Geor" typeface="Sylfaen"/>
+        <a:font script="Armn" typeface="Arial"/>
+        <a:font script="Bugi" typeface="Leelawadee UI"/>
+        <a:font script="Bopo" typeface="Microsoft JhengHei"/>
+        <a:font script="Java" typeface="Javanese Text"/>
+        <a:font script="Lisu" typeface="Segoe UI"/>
+        <a:font script="Mymr" typeface="Myanmar Text"/>
+        <a:font script="Nkoo" typeface="Ebrima"/>
+        <a:font script="Olck" typeface="Nirmala UI"/>
+        <a:font script="Osma" typeface="Ebrima"/>
+        <a:font script="Phag" typeface="Phagspa"/>
+        <a:font script="Syrn" typeface="Estrangelo Edessa"/>
+        <a:font script="Syrj" typeface="Estrangelo Edessa"/>
+        <a:font script="Syre" typeface="Estrangelo Edessa"/>
+        <a:font script="Sora" typeface="Nirmala UI"/>
+        <a:font script="Tale" typeface="Microsoft Tai Le"/>
+        <a:font script="Talu" typeface="Microsoft New Tai Lue"/>
+        <a:font script="Tfng" typeface="Ebrima"/>
       </a:minorFont>
     </a:fontScheme>
     <a:fmtScheme name="Tema de Office">
@@ -4969,13 +4133,6 @@
         </a:gradFill>
       </a:fillStyleLst>
       <a:lnStyleLst>
-        <a:ln w="6350" cap="flat" cmpd="sng" algn="ctr">
-          <a:solidFill>
-            <a:schemeClr val="phClr"/>
-          </a:solidFill>
-          <a:prstDash val="solid"/>
-          <a:miter lim="800000"/>
-        </a:ln>
         <a:ln w="12700" cap="flat" cmpd="sng" algn="ctr">
           <a:solidFill>
             <a:schemeClr val="phClr"/>
@@ -4984,6 +4141,13 @@
           <a:miter lim="800000"/>
         </a:ln>
         <a:ln w="19050" cap="flat" cmpd="sng" algn="ctr">
+          <a:solidFill>
+            <a:schemeClr val="phClr"/>
+          </a:solidFill>
+          <a:prstDash val="solid"/>
+          <a:miter lim="800000"/>
+        </a:ln>
+        <a:ln w="25400" cap="flat" cmpd="sng" algn="ctr">
           <a:solidFill>
             <a:schemeClr val="phClr"/>
           </a:solidFill>
@@ -5048,11 +4212,31 @@
       </a:bgFillStyleLst>
     </a:fmtScheme>
   </a:themeElements>
-  <a:objectDefaults/>
+  <a:objectDefaults>
+    <a:lnDef>
+      <a:spPr/>
+      <a:bodyPr/>
+      <a:lstStyle/>
+      <a:style>
+        <a:lnRef idx="2">
+          <a:schemeClr val="accent1"/>
+        </a:lnRef>
+        <a:fillRef idx="0">
+          <a:schemeClr val="accent1"/>
+        </a:fillRef>
+        <a:effectRef idx="1">
+          <a:schemeClr val="accent1"/>
+        </a:effectRef>
+        <a:fontRef idx="minor">
+          <a:schemeClr val="tx1"/>
+        </a:fontRef>
+      </a:style>
+    </a:lnDef>
+  </a:objectDefaults>
   <a:extraClrSchemeLst/>
   <a:extLst>
     <a:ext uri="{05A4C25C-085E-4340-85A3-A5531E510DB2}">
-      <thm15:themeFamily xmlns:thm15="http://schemas.microsoft.com/office/thememl/2012/main" name="Office 2013 - 2022 Theme" id="{62F939B6-93AF-4DB8-9C6B-D6C7DFDC589F}" vid="{4A3C46E8-61CC-4603-A589-7422A47A8E4A}"/>
+      <thm15:themeFamily xmlns:thm15="http://schemas.microsoft.com/office/thememl/2012/main" name="Office Theme" id="{2E142A2C-CD16-42D6-873A-C26D2A0506FA}" vid="{1BDDFF52-6CD6-40A5-AB3C-68EB2F1E4D0A}"/>
     </a:ext>
   </a:extLst>
 </a:theme>

--- a/public/assets/PlantillaCartel2026.pptx
+++ b/public/assets/PlantillaCartel2026.pptx
@@ -243,7 +243,7 @@
           <a:p>
             <a:fld id="{3498CC9A-6EF8-4CC1-99DE-9957FB4ED3A6}" type="datetimeFigureOut">
               <a:rPr lang="es-MX" smtClean="0"/>
-              <a:t>04/03/26</a:t>
+              <a:t>05/03/2026</a:t>
             </a:fld>
             <a:endParaRPr lang="es-MX"/>
           </a:p>
@@ -413,7 +413,7 @@
           <a:p>
             <a:fld id="{3498CC9A-6EF8-4CC1-99DE-9957FB4ED3A6}" type="datetimeFigureOut">
               <a:rPr lang="es-MX" smtClean="0"/>
-              <a:t>04/03/26</a:t>
+              <a:t>05/03/2026</a:t>
             </a:fld>
             <a:endParaRPr lang="es-MX"/>
           </a:p>
@@ -593,7 +593,7 @@
           <a:p>
             <a:fld id="{3498CC9A-6EF8-4CC1-99DE-9957FB4ED3A6}" type="datetimeFigureOut">
               <a:rPr lang="es-MX" smtClean="0"/>
-              <a:t>04/03/26</a:t>
+              <a:t>05/03/2026</a:t>
             </a:fld>
             <a:endParaRPr lang="es-MX"/>
           </a:p>
@@ -763,7 +763,7 @@
           <a:p>
             <a:fld id="{3498CC9A-6EF8-4CC1-99DE-9957FB4ED3A6}" type="datetimeFigureOut">
               <a:rPr lang="es-MX" smtClean="0"/>
-              <a:t>04/03/26</a:t>
+              <a:t>05/03/2026</a:t>
             </a:fld>
             <a:endParaRPr lang="es-MX"/>
           </a:p>
@@ -1009,7 +1009,7 @@
           <a:p>
             <a:fld id="{3498CC9A-6EF8-4CC1-99DE-9957FB4ED3A6}" type="datetimeFigureOut">
               <a:rPr lang="es-MX" smtClean="0"/>
-              <a:t>04/03/26</a:t>
+              <a:t>05/03/2026</a:t>
             </a:fld>
             <a:endParaRPr lang="es-MX"/>
           </a:p>
@@ -1241,7 +1241,7 @@
           <a:p>
             <a:fld id="{3498CC9A-6EF8-4CC1-99DE-9957FB4ED3A6}" type="datetimeFigureOut">
               <a:rPr lang="es-MX" smtClean="0"/>
-              <a:t>04/03/26</a:t>
+              <a:t>05/03/2026</a:t>
             </a:fld>
             <a:endParaRPr lang="es-MX"/>
           </a:p>
@@ -1608,7 +1608,7 @@
           <a:p>
             <a:fld id="{3498CC9A-6EF8-4CC1-99DE-9957FB4ED3A6}" type="datetimeFigureOut">
               <a:rPr lang="es-MX" smtClean="0"/>
-              <a:t>04/03/26</a:t>
+              <a:t>05/03/2026</a:t>
             </a:fld>
             <a:endParaRPr lang="es-MX"/>
           </a:p>
@@ -1726,7 +1726,7 @@
           <a:p>
             <a:fld id="{3498CC9A-6EF8-4CC1-99DE-9957FB4ED3A6}" type="datetimeFigureOut">
               <a:rPr lang="es-MX" smtClean="0"/>
-              <a:t>04/03/26</a:t>
+              <a:t>05/03/2026</a:t>
             </a:fld>
             <a:endParaRPr lang="es-MX"/>
           </a:p>
@@ -1821,7 +1821,7 @@
           <a:p>
             <a:fld id="{3498CC9A-6EF8-4CC1-99DE-9957FB4ED3A6}" type="datetimeFigureOut">
               <a:rPr lang="es-MX" smtClean="0"/>
-              <a:t>04/03/26</a:t>
+              <a:t>05/03/2026</a:t>
             </a:fld>
             <a:endParaRPr lang="es-MX"/>
           </a:p>
@@ -2098,7 +2098,7 @@
           <a:p>
             <a:fld id="{3498CC9A-6EF8-4CC1-99DE-9957FB4ED3A6}" type="datetimeFigureOut">
               <a:rPr lang="es-MX" smtClean="0"/>
-              <a:t>04/03/26</a:t>
+              <a:t>05/03/2026</a:t>
             </a:fld>
             <a:endParaRPr lang="es-MX"/>
           </a:p>
@@ -2355,7 +2355,7 @@
           <a:p>
             <a:fld id="{3498CC9A-6EF8-4CC1-99DE-9957FB4ED3A6}" type="datetimeFigureOut">
               <a:rPr lang="es-MX" smtClean="0"/>
-              <a:t>04/03/26</a:t>
+              <a:t>05/03/2026</a:t>
             </a:fld>
             <a:endParaRPr lang="es-MX"/>
           </a:p>
@@ -2568,7 +2568,7 @@
           <a:p>
             <a:fld id="{3498CC9A-6EF8-4CC1-99DE-9957FB4ED3A6}" type="datetimeFigureOut">
               <a:rPr lang="es-MX" smtClean="0"/>
-              <a:t>04/03/26</a:t>
+              <a:t>05/03/2026</a:t>
             </a:fld>
             <a:endParaRPr lang="es-MX"/>
           </a:p>
@@ -2978,12 +2978,12 @@
           <p:cNvPr id="3" name="Imagen 2">
             <a:extLst>
               <a:ext uri="{FF2B5EF4-FFF2-40B4-BE49-F238E27FC236}">
-                <a16:creationId xmlns:a16="http://schemas.microsoft.com/office/drawing/2014/main" id="{4EC7FF9E-C0BA-88D2-F4EA-15ACFD029541}"/>
+                <a16:creationId xmlns:a16="http://schemas.microsoft.com/office/drawing/2014/main" id="{BEB5F3D3-2D1F-7165-9B1E-F4D0802369BF}"/>
               </a:ext>
             </a:extLst>
           </p:cNvPr>
           <p:cNvPicPr>
-            <a:picLocks noChangeAspect="1"/>
+            <a:picLocks noGrp="1" noRot="1" noChangeAspect="1" noMove="1" noResize="1" noEditPoints="1" noAdjustHandles="1" noChangeArrowheads="1" noChangeShapeType="1" noCrop="1"/>
           </p:cNvPicPr>
           <p:nvPr/>
         </p:nvPicPr>
@@ -3001,7 +3001,7 @@
         </p:blipFill>
         <p:spPr>
           <a:xfrm>
-            <a:off x="333" y="207523"/>
+            <a:off x="166" y="0"/>
             <a:ext cx="32398955" cy="43200638"/>
           </a:xfrm>
           <a:prstGeom prst="rect">
@@ -3869,48 +3869,6 @@
               <a:latin typeface="Arial" panose="020B0604020202020204" pitchFamily="34" charset="0"/>
               <a:cs typeface="Arial" panose="020B0604020202020204" pitchFamily="34" charset="0"/>
             </a:endParaRPr>
-          </a:p>
-        </p:txBody>
-      </p:sp>
-      <p:sp>
-        <p:nvSpPr>
-          <p:cNvPr id="2" name="CuadroTexto 1">
-            <a:extLst>
-              <a:ext uri="{FF2B5EF4-FFF2-40B4-BE49-F238E27FC236}">
-                <a16:creationId xmlns:a16="http://schemas.microsoft.com/office/drawing/2014/main" id="{D57D3553-3BFD-D84D-63A7-C47B3B4FD095}"/>
-              </a:ext>
-            </a:extLst>
-          </p:cNvPr>
-          <p:cNvSpPr txBox="1"/>
-          <p:nvPr/>
-        </p:nvSpPr>
-        <p:spPr>
-          <a:xfrm>
-            <a:off x="24535766" y="3472437"/>
-            <a:ext cx="720000" cy="830997"/>
-          </a:xfrm>
-          <a:prstGeom prst="rect">
-            <a:avLst/>
-          </a:prstGeom>
-          <a:solidFill>
-            <a:schemeClr val="bg1"/>
-          </a:solidFill>
-        </p:spPr>
-        <p:txBody>
-          <a:bodyPr wrap="square" rtlCol="0">
-            <a:spAutoFit/>
-          </a:bodyPr>
-          <a:lstStyle/>
-          <a:p>
-            <a:r>
-              <a:rPr lang="es-ES_tradnl" sz="4800" b="1" dirty="0">
-                <a:solidFill>
-                  <a:srgbClr val="88133A"/>
-                </a:solidFill>
-                <a:latin typeface="Bernard MT Condensed" panose="02050806060905020404" pitchFamily="18" charset="77"/>
-              </a:rPr>
-              <a:t>III</a:t>
-            </a:r>
           </a:p>
         </p:txBody>
       </p:sp>
